--- a/docs/Tesis_Avance_Presentacion.pptx
+++ b/docs/Tesis_Avance_Presentacion.pptx
@@ -19,6 +19,8 @@
     <p:sldId id="267" r:id="rId13"/>
     <p:sldId id="268" r:id="rId14"/>
     <p:sldId id="269" r:id="rId15"/>
+    <p:sldId id="274" r:id="rId25"/>
+    <p:sldId id="275" r:id="rId26"/>
     <p:sldId id="270" r:id="rId16"/>
     <p:sldId id="271" r:id="rId17"/>
     <p:sldId id="272" r:id="rId18"/>
@@ -2407,6 +2409,10 @@
           </a:solidFill>
           <a:ln/>
         </p:spPr>
+        <p:txBody>
+          <a:bodyPr/>
+          <a:p/>
+        </p:txBody>
       </p:sp>
       <p:sp>
         <p:nvSpPr>
@@ -2564,6 +2570,10 @@
             <a:prstDash val="solid"/>
           </a:ln>
         </p:spPr>
+        <p:txBody>
+          <a:bodyPr/>
+          <a:p/>
+        </p:txBody>
       </p:sp>
       <p:sp>
         <p:nvSpPr>
@@ -2800,6 +2810,10 @@
           </a:solidFill>
           <a:ln/>
         </p:spPr>
+        <p:txBody>
+          <a:bodyPr/>
+          <a:p/>
+        </p:txBody>
       </p:sp>
       <p:sp>
         <p:nvSpPr>
@@ -2862,6 +2876,10 @@
             <a:prstDash val="solid"/>
           </a:ln>
         </p:spPr>
+        <p:txBody>
+          <a:bodyPr/>
+          <a:p/>
+        </p:txBody>
       </p:sp>
       <p:sp>
         <p:nvSpPr>
@@ -2935,7 +2953,7 @@
                 <a:ea typeface="Calibri" pitchFamily="34" charset="-122"/>
                 <a:cs typeface="Calibri" pitchFamily="34" charset="-120"/>
               </a:rPr>
-              <a:t>10 / 18</a:t>
+              <a:t>10 / 20</a:t>
             </a:r>
             <a:endParaRPr lang="en-US" sz="1000" dirty="0"/>
           </a:p>
@@ -4212,6 +4230,10 @@
             </a:outerShdw>
           </a:effectLst>
         </p:spPr>
+        <p:txBody>
+          <a:bodyPr/>
+          <a:p/>
+        </p:txBody>
       </p:sp>
       <p:sp>
         <p:nvSpPr>
@@ -4232,6 +4254,10 @@
           </a:solidFill>
           <a:ln/>
         </p:spPr>
+        <p:txBody>
+          <a:bodyPr/>
+          <a:p/>
+        </p:txBody>
       </p:sp>
       <p:sp>
         <p:nvSpPr>
@@ -4362,6 +4388,10 @@
           </a:solidFill>
           <a:ln/>
         </p:spPr>
+        <p:txBody>
+          <a:bodyPr/>
+          <a:p/>
+        </p:txBody>
       </p:sp>
       <p:sp>
         <p:nvSpPr>
@@ -4424,6 +4454,10 @@
             <a:prstDash val="solid"/>
           </a:ln>
         </p:spPr>
+        <p:txBody>
+          <a:bodyPr/>
+          <a:p/>
+        </p:txBody>
       </p:sp>
       <p:sp>
         <p:nvSpPr>
@@ -4497,7 +4531,7 @@
                 <a:ea typeface="Calibri" pitchFamily="34" charset="-122"/>
                 <a:cs typeface="Calibri" pitchFamily="34" charset="-120"/>
               </a:rPr>
-              <a:t>11 / 18</a:t>
+              <a:t>11 / 20</a:t>
             </a:r>
             <a:endParaRPr lang="en-US" sz="1000" dirty="0"/>
           </a:p>
@@ -8468,6 +8502,10 @@
           </a:solidFill>
           <a:ln/>
         </p:spPr>
+        <p:txBody>
+          <a:bodyPr/>
+          <a:p/>
+        </p:txBody>
       </p:sp>
       <p:sp>
         <p:nvSpPr>
@@ -8530,6 +8568,10 @@
             <a:prstDash val="solid"/>
           </a:ln>
         </p:spPr>
+        <p:txBody>
+          <a:bodyPr/>
+          <a:p/>
+        </p:txBody>
       </p:sp>
       <p:sp>
         <p:nvSpPr>
@@ -8603,7 +8645,7 @@
                 <a:ea typeface="Calibri" pitchFamily="34" charset="-122"/>
                 <a:cs typeface="Calibri" pitchFamily="34" charset="-120"/>
               </a:rPr>
-              <a:t>12 / 18</a:t>
+              <a:t>12 / 20</a:t>
             </a:r>
             <a:endParaRPr lang="en-US" sz="1000" dirty="0"/>
           </a:p>
@@ -8723,6 +8765,10 @@
           </a:solidFill>
           <a:ln/>
         </p:spPr>
+        <p:txBody>
+          <a:bodyPr/>
+          <a:p/>
+        </p:txBody>
       </p:sp>
       <p:sp>
         <p:nvSpPr>
@@ -8785,6 +8831,10 @@
             <a:prstDash val="solid"/>
           </a:ln>
         </p:spPr>
+        <p:txBody>
+          <a:bodyPr/>
+          <a:p/>
+        </p:txBody>
       </p:sp>
       <p:sp>
         <p:nvSpPr>
@@ -8858,7 +8908,7 @@
                 <a:ea typeface="Calibri" pitchFamily="34" charset="-122"/>
                 <a:cs typeface="Calibri" pitchFamily="34" charset="-120"/>
               </a:rPr>
-              <a:t>13 / 18</a:t>
+              <a:t>13 / 20</a:t>
             </a:r>
             <a:endParaRPr lang="en-US" sz="1000" dirty="0"/>
           </a:p>
@@ -9219,7 +9269,7 @@
                           <a:ea typeface="Calibri" pitchFamily="34" charset="-122"/>
                           <a:cs typeface="Calibri" pitchFamily="34" charset="-120"/>
                         </a:rPr>
-                        <a:t>83.17</a:t>
+                        <a:t>158.00</a:t>
                       </a:r>
                       <a:endParaRPr lang="en-US" sz="1100" dirty="0">
                         <a:latin typeface="Calibri" charset="0"/>
@@ -9284,7 +9334,7 @@
                           <a:ea typeface="Calibri" pitchFamily="34" charset="-122"/>
                           <a:cs typeface="Calibri" pitchFamily="34" charset="-120"/>
                         </a:rPr>
-                        <a:t>7.9e-16</a:t>
+                        <a:t>8.4e-29</a:t>
                       </a:r>
                       <a:endParaRPr lang="en-US" sz="1100" dirty="0">
                         <a:latin typeface="Calibri" charset="0"/>
@@ -9419,7 +9469,7 @@
                           <a:ea typeface="Calibri" pitchFamily="34" charset="-122"/>
                           <a:cs typeface="Calibri" pitchFamily="34" charset="-120"/>
                         </a:rPr>
-                        <a:t>100.74</a:t>
+                        <a:t>179.41</a:t>
                       </a:r>
                       <a:endParaRPr lang="en-US" sz="1100" dirty="0">
                         <a:latin typeface="Calibri" charset="0"/>
@@ -9487,7 +9537,7 @@
                           <a:ea typeface="Calibri" pitchFamily="34" charset="-122"/>
                           <a:cs typeface="Calibri" pitchFamily="34" charset="-120"/>
                         </a:rPr>
-                        <a:t>1.8e-19</a:t>
+                        <a:t>3.1e-33</a:t>
                       </a:r>
                       <a:endParaRPr lang="en-US" sz="1100" dirty="0">
                         <a:latin typeface="Calibri" charset="0"/>
@@ -9622,7 +9672,7 @@
                           <a:ea typeface="Calibri" pitchFamily="34" charset="-122"/>
                           <a:cs typeface="Calibri" pitchFamily="34" charset="-120"/>
                         </a:rPr>
-                        <a:t>83.17</a:t>
+                        <a:t>158.00</a:t>
                       </a:r>
                       <a:endParaRPr lang="en-US" sz="1100" dirty="0">
                         <a:latin typeface="Calibri" charset="0"/>
@@ -9687,7 +9737,7 @@
                           <a:ea typeface="Calibri" pitchFamily="34" charset="-122"/>
                           <a:cs typeface="Calibri" pitchFamily="34" charset="-120"/>
                         </a:rPr>
-                        <a:t>7.9e-16</a:t>
+                        <a:t>8.4e-29</a:t>
                       </a:r>
                       <a:endParaRPr lang="en-US" sz="1100" dirty="0">
                         <a:latin typeface="Calibri" charset="0"/>
@@ -9822,7 +9872,7 @@
                           <a:ea typeface="Calibri" pitchFamily="34" charset="-122"/>
                           <a:cs typeface="Calibri" pitchFamily="34" charset="-120"/>
                         </a:rPr>
-                        <a:t>109.40</a:t>
+                        <a:t>192.66</a:t>
                       </a:r>
                       <a:endParaRPr lang="en-US" sz="1100" dirty="0">
                         <a:latin typeface="Calibri" charset="0"/>
@@ -9890,7 +9940,7 @@
                           <a:ea typeface="Calibri" pitchFamily="34" charset="-122"/>
                           <a:cs typeface="Calibri" pitchFamily="34" charset="-120"/>
                         </a:rPr>
-                        <a:t>2.7e-21</a:t>
+                        <a:t>5.5e-36</a:t>
                       </a:r>
                       <a:endParaRPr lang="en-US" sz="1100" dirty="0">
                         <a:latin typeface="Calibri" charset="0"/>
@@ -10025,7 +10075,7 @@
                           <a:ea typeface="Calibri" pitchFamily="34" charset="-122"/>
                           <a:cs typeface="Calibri" pitchFamily="34" charset="-120"/>
                         </a:rPr>
-                        <a:t>65.83</a:t>
+                        <a:t>159.67</a:t>
                       </a:r>
                       <a:endParaRPr lang="en-US" sz="1100" dirty="0">
                         <a:latin typeface="Calibri" charset="0"/>
@@ -10090,7 +10140,7 @@
                           <a:ea typeface="Calibri" pitchFamily="34" charset="-122"/>
                           <a:cs typeface="Calibri" pitchFamily="34" charset="-120"/>
                         </a:rPr>
-                        <a:t>2.9e-12</a:t>
+                        <a:t>3.8e-29</a:t>
                       </a:r>
                       <a:endParaRPr lang="en-US" sz="1100" dirty="0">
                         <a:latin typeface="Calibri" charset="0"/>
@@ -10225,7 +10275,7 @@
                           <a:ea typeface="Calibri" pitchFamily="34" charset="-122"/>
                           <a:cs typeface="Calibri" pitchFamily="34" charset="-120"/>
                         </a:rPr>
-                        <a:t>52.23</a:t>
+                        <a:t>147.37</a:t>
                       </a:r>
                       <a:endParaRPr lang="en-US" sz="1100" dirty="0">
                         <a:latin typeface="Calibri" charset="0"/>
@@ -10293,7 +10343,7 @@
                           <a:ea typeface="Calibri" pitchFamily="34" charset="-122"/>
                           <a:cs typeface="Calibri" pitchFamily="34" charset="-120"/>
                         </a:rPr>
-                        <a:t>1.7e-9</a:t>
+                        <a:t>1.3e-26</a:t>
                       </a:r>
                       <a:endParaRPr lang="en-US" sz="1100" dirty="0">
                         <a:latin typeface="Calibri" charset="0"/>
@@ -10382,7 +10432,7 @@
                 <a:ea typeface="Calibri" pitchFamily="34" charset="-122"/>
                 <a:cs typeface="Calibri" pitchFamily="34" charset="-120"/>
               </a:rPr>
-              <a:t>Las 6 métricas son altamente significativas (todas p &lt;&lt; 0.001).</a:t>
+              <a:t>Las doce métricas resultan altamente significativas (p &lt;&lt; 0,001); se muestran seis.</a:t>
             </a:r>
             <a:endParaRPr lang="en-US" sz="1100" dirty="0"/>
           </a:p>
@@ -10436,7 +10486,7 @@
           <p:nvPr/>
         </p:nvPicPr>
         <p:blipFill>
-          <a:blip r:embed="rId1"/>
+          <a:blip r:embed="rId4"/>
           <a:stretch>
             <a:fillRect/>
           </a:stretch>
@@ -10444,7 +10494,7 @@
         <p:spPr>
           <a:xfrm>
             <a:off x="6217920" y="1828800"/>
-            <a:ext cx="5577840" cy="3200400"/>
+            <a:ext cx="5577840" cy="3718560"/>
           </a:xfrm>
           <a:prstGeom prst="rect">
             <a:avLst/>
@@ -10459,7 +10509,7 @@
         </p:nvSpPr>
         <p:spPr>
           <a:xfrm>
-            <a:off x="6217920" y="5120640"/>
+            <a:off x="6217920" y="5380640"/>
             <a:ext cx="5486400" cy="365760"/>
           </a:xfrm>
           <a:prstGeom prst="rect">
@@ -10484,7 +10534,7 @@
                 <a:ea typeface="Calibri" pitchFamily="34" charset="-122"/>
                 <a:cs typeface="Calibri" pitchFamily="34" charset="-120"/>
               </a:rPr>
-              <a:t>Pirámide de Laplace lidera (2.03). La mejor Top-Hat es disk_L5 (3.28).</a:t>
+              <a:t>Pirámide de Laplace lidera el agregado (4.42); la mejor Top-Hat WTH es disco L=5 (5.00), muy próxima.</a:t>
             </a:r>
             <a:endParaRPr lang="en-US" sz="1100" dirty="0"/>
           </a:p>
@@ -10541,6 +10591,10 @@
           </a:solidFill>
           <a:ln/>
         </p:spPr>
+        <p:txBody>
+          <a:bodyPr/>
+          <a:p/>
+        </p:txBody>
       </p:sp>
       <p:sp>
         <p:nvSpPr>
@@ -10603,6 +10657,10 @@
             <a:prstDash val="solid"/>
           </a:ln>
         </p:spPr>
+        <p:txBody>
+          <a:bodyPr/>
+          <a:p/>
+        </p:txBody>
       </p:sp>
       <p:sp>
         <p:nvSpPr>
@@ -10676,7 +10734,7 @@
                 <a:ea typeface="Calibri" pitchFamily="34" charset="-122"/>
                 <a:cs typeface="Calibri" pitchFamily="34" charset="-120"/>
               </a:rPr>
-              <a:t>14 / 18</a:t>
+              <a:t>14 / 20</a:t>
             </a:r>
             <a:endParaRPr lang="en-US" sz="1000" dirty="0"/>
           </a:p>
@@ -10754,6 +10812,504 @@
 </file>
 
 <file path=ppt/slides/slide15.xml><?xml version="1.0" encoding="utf-8"?>
+<p:sld xmlns:a="http://schemas.openxmlformats.org/drawingml/2006/main" xmlns:p="http://schemas.openxmlformats.org/presentationml/2006/main" xmlns:r="http://schemas.openxmlformats.org/officeDocument/2006/relationships">
+  <p:cSld>
+    <p:spTree>
+      <p:nvGrpSpPr>
+        <p:cNvPr id="1" name=""/>
+        <p:cNvGrpSpPr/>
+        <p:nvPr/>
+      </p:nvGrpSpPr>
+      <p:grpSpPr/>
+      <p:sp>
+        <p:nvSpPr>
+          <p:cNvPr id="2" name="Shape 0"/>
+          <p:cNvSpPr/>
+          <p:nvPr/>
+        </p:nvSpPr>
+        <p:spPr>
+          <a:xfrm>
+            <a:off x="0" y="0"/>
+            <a:ext cx="320040" cy="6858000"/>
+          </a:xfrm>
+          <a:prstGeom prst="rect">
+            <a:avLst/>
+          </a:prstGeom>
+          <a:solidFill>
+            <a:srgbClr val="1E2761"/>
+          </a:solidFill>
+          <a:ln/>
+        </p:spPr>
+        <p:txBody>
+          <a:bodyPr/>
+          <a:p/>
+        </p:txBody>
+      </p:sp>
+      <p:sp>
+        <p:nvSpPr>
+          <p:cNvPr id="3" name="Text 1"/>
+          <p:cNvSpPr/>
+          <p:nvPr/>
+        </p:nvSpPr>
+        <p:spPr>
+          <a:xfrm>
+            <a:off x="640080" y="320040"/>
+            <a:ext cx="10607040" cy="640080"/>
+          </a:xfrm>
+          <a:prstGeom prst="rect">
+            <a:avLst/>
+          </a:prstGeom>
+          <a:noFill/>
+          <a:ln/>
+        </p:spPr>
+        <p:txBody>
+          <a:bodyPr wrap="square" lIns="0" tIns="0" rIns="0" bIns="0" rtlCol="0" anchor="ctr"/>
+          <a:lstStyle/>
+          <a:p>
+            <a:pPr indent="0" marL="0">
+              <a:buNone/>
+            </a:pPr>
+            <a:r>
+              <a:rPr lang="en-US" sz="2800" b="1" dirty="0">
+                <a:solidFill>
+                  <a:srgbClr val="1E2761"/>
+                </a:solidFill>
+                <a:latin typeface="Georgia" pitchFamily="34" charset="0"/>
+                <a:ea typeface="Georgia" pitchFamily="34" charset="-122"/>
+                <a:cs typeface="Georgia" pitchFamily="34" charset="-120"/>
+              </a:rPr>
+              <a:t>Resultados — métricas estándar de calidad</a:t>
+            </a:r>
+            <a:endParaRPr lang="en-US" sz="2800" dirty="0"/>
+          </a:p>
+        </p:txBody>
+      </p:sp>
+      <p:sp>
+        <p:nvSpPr>
+          <p:cNvPr id="4" name="Shape 2"/>
+          <p:cNvSpPr/>
+          <p:nvPr/>
+        </p:nvSpPr>
+        <p:spPr>
+          <a:xfrm>
+            <a:off x="640080" y="960120"/>
+            <a:ext cx="10881360" cy="0"/>
+          </a:xfrm>
+          <a:prstGeom prst="line">
+            <a:avLst/>
+          </a:prstGeom>
+          <a:noFill/>
+          <a:ln w="19050">
+            <a:solidFill>
+              <a:srgbClr val="CADCFC"/>
+            </a:solidFill>
+            <a:prstDash val="solid"/>
+          </a:ln>
+        </p:spPr>
+        <p:txBody>
+          <a:bodyPr/>
+          <a:p/>
+        </p:txBody>
+      </p:sp>
+      <p:sp>
+        <p:nvSpPr>
+          <p:cNvPr id="5" name="Text 3"/>
+          <p:cNvSpPr/>
+          <p:nvPr/>
+        </p:nvSpPr>
+        <p:spPr>
+          <a:xfrm>
+            <a:off x="640080" y="6492240"/>
+            <a:ext cx="6400800" cy="274320"/>
+          </a:xfrm>
+          <a:prstGeom prst="rect">
+            <a:avLst/>
+          </a:prstGeom>
+          <a:noFill/>
+          <a:ln/>
+        </p:spPr>
+        <p:txBody>
+          <a:bodyPr wrap="square" lIns="0" tIns="0" rIns="0" bIns="0" rtlCol="0" anchor="ctr"/>
+          <a:lstStyle/>
+          <a:p>
+            <a:pPr indent="0" marL="0">
+              <a:buNone/>
+            </a:pPr>
+            <a:r>
+              <a:rPr lang="en-US" sz="1000" i="1" dirty="0">
+                <a:solidFill>
+                  <a:srgbClr val="64748B"/>
+                </a:solidFill>
+                <a:latin typeface="Calibri" pitchFamily="34" charset="0"/>
+                <a:ea typeface="Calibri" pitchFamily="34" charset="-122"/>
+                <a:cs typeface="Calibri" pitchFamily="34" charset="-120"/>
+              </a:rPr>
+              <a:t>Tesis Maestría en Ciencias de Datos — UCOM</a:t>
+            </a:r>
+            <a:endParaRPr lang="en-US" sz="1000" dirty="0"/>
+          </a:p>
+        </p:txBody>
+      </p:sp>
+      <p:sp>
+        <p:nvSpPr>
+          <p:cNvPr id="6" name="Text 4"/>
+          <p:cNvSpPr/>
+          <p:nvPr/>
+        </p:nvSpPr>
+        <p:spPr>
+          <a:xfrm>
+            <a:off x="11064240" y="6492240"/>
+            <a:ext cx="457200" cy="274320"/>
+          </a:xfrm>
+          <a:prstGeom prst="rect">
+            <a:avLst/>
+          </a:prstGeom>
+          <a:noFill/>
+          <a:ln/>
+        </p:spPr>
+        <p:txBody>
+          <a:bodyPr wrap="square" lIns="0" tIns="0" rIns="0" bIns="0" rtlCol="0" anchor="ctr"/>
+          <a:lstStyle/>
+          <a:p>
+            <a:pPr algn="r" indent="0" marL="0">
+              <a:buNone/>
+            </a:pPr>
+            <a:r>
+              <a:rPr lang="en-US" sz="1000" dirty="0">
+                <a:solidFill>
+                  <a:srgbClr val="64748B"/>
+                </a:solidFill>
+                <a:latin typeface="Calibri" pitchFamily="34" charset="0"/>
+                <a:ea typeface="Calibri" pitchFamily="34" charset="-122"/>
+                <a:cs typeface="Calibri" pitchFamily="34" charset="-120"/>
+              </a:rPr>
+              <a:t>15 / 20</a:t>
+            </a:r>
+            <a:endParaRPr lang="en-US" sz="1000" dirty="0"/>
+          </a:p>
+        </p:txBody>
+      </p:sp>
+      <p:pic>
+        <p:nvPicPr>
+          <p:cNvPr id="7" name="Image 0" descr="/sessions/modest-affectionate-curie/mnt/mastertesis/tesis_mciencias_datos/docs/figures/fig_heatmap_tophat.png">    </p:cNvPr>
+          <p:cNvPicPr>
+            <a:picLocks noChangeAspect="1"/>
+          </p:cNvPicPr>
+          <p:nvPr/>
+        </p:nvPicPr>
+        <p:blipFill>
+          <a:blip r:embed="rId2"/>
+          <a:stretch>
+            <a:fillRect/>
+          </a:stretch>
+        </p:blipFill>
+        <p:spPr>
+          <a:xfrm>
+            <a:off x="1219200" y="1050000"/>
+            <a:ext cx="9753600" cy="5201920"/>
+          </a:xfrm>
+          <a:prstGeom prst="rect">
+            <a:avLst/>
+          </a:prstGeom>
+        </p:spPr>
+      </p:pic>
+      <p:sp>
+        <p:nvSpPr>
+          <p:cNvPr id="8" name="Text 5"/>
+          <p:cNvSpPr/>
+          <p:nvPr/>
+        </p:nvSpPr>
+        <p:spPr>
+          <a:xfrm>
+            <a:off x="640080" y="6263640"/>
+            <a:ext cx="10881360" cy="365760"/>
+          </a:xfrm>
+          <a:prstGeom prst="rect">
+            <a:avLst/>
+          </a:prstGeom>
+          <a:noFill/>
+          <a:ln/>
+        </p:spPr>
+        <p:txBody>
+          <a:bodyPr wrap="square" lIns="0" tIns="0" rIns="0" bIns="0" rtlCol="0" anchor="ctr"/>
+          <a:lstStyle/>
+          <a:p>
+            <a:pPr algn="ctr" indent="0" marL="0">
+              <a:buNone/>
+            </a:pPr>
+            <a:r>
+              <a:rPr lang="en-US" sz="1100" i="1" dirty="0">
+                <a:solidFill>
+                  <a:srgbClr val="1E2761"/>
+                </a:solidFill>
+                <a:latin typeface="Calibri" pitchFamily="34" charset="0"/>
+                <a:ea typeface="Calibri" pitchFamily="34" charset="-122"/>
+                <a:cs typeface="Calibri" pitchFamily="34" charset="-120"/>
+              </a:rPr>
+              <a:t>Figura. Qabf, Nabf, SSIM, SCD, VIF y SF por método. La Top-Hat WTH lidera SSIM y SCD y genera menos artefactos (Nabf) entre los multiescala; las variantes +BTH disparan el Nabf.</a:t>
+            </a:r>
+            <a:endParaRPr lang="en-US" sz="1100" dirty="0"/>
+          </a:p>
+        </p:txBody>
+      </p:sp>
+    </p:spTree>
+  </p:cSld>
+  <p:clrMapOvr>
+    <a:masterClrMapping/>
+  </p:clrMapOvr>
+</p:sld>
+</file>
+
+<file path=ppt/slides/slide16.xml><?xml version="1.0" encoding="utf-8"?>
+<p:sld xmlns:a="http://schemas.openxmlformats.org/drawingml/2006/main" xmlns:p="http://schemas.openxmlformats.org/presentationml/2006/main" xmlns:r="http://schemas.openxmlformats.org/officeDocument/2006/relationships">
+  <p:cSld>
+    <p:spTree>
+      <p:nvGrpSpPr>
+        <p:cNvPr id="1" name=""/>
+        <p:cNvGrpSpPr/>
+        <p:nvPr/>
+      </p:nvGrpSpPr>
+      <p:grpSpPr/>
+      <p:sp>
+        <p:nvSpPr>
+          <p:cNvPr id="2" name="Shape 0"/>
+          <p:cNvSpPr/>
+          <p:nvPr/>
+        </p:nvSpPr>
+        <p:spPr>
+          <a:xfrm>
+            <a:off x="0" y="0"/>
+            <a:ext cx="320040" cy="6858000"/>
+          </a:xfrm>
+          <a:prstGeom prst="rect">
+            <a:avLst/>
+          </a:prstGeom>
+          <a:solidFill>
+            <a:srgbClr val="1E2761"/>
+          </a:solidFill>
+          <a:ln/>
+        </p:spPr>
+        <p:txBody>
+          <a:bodyPr/>
+          <a:p/>
+        </p:txBody>
+      </p:sp>
+      <p:sp>
+        <p:nvSpPr>
+          <p:cNvPr id="3" name="Text 1"/>
+          <p:cNvSpPr/>
+          <p:nvPr/>
+        </p:nvSpPr>
+        <p:spPr>
+          <a:xfrm>
+            <a:off x="640080" y="320040"/>
+            <a:ext cx="10607040" cy="640080"/>
+          </a:xfrm>
+          <a:prstGeom prst="rect">
+            <a:avLst/>
+          </a:prstGeom>
+          <a:noFill/>
+          <a:ln/>
+        </p:spPr>
+        <p:txBody>
+          <a:bodyPr wrap="square" lIns="0" tIns="0" rIns="0" bIns="0" rtlCol="0" anchor="ctr"/>
+          <a:lstStyle/>
+          <a:p>
+            <a:pPr indent="0" marL="0">
+              <a:buNone/>
+            </a:pPr>
+            <a:r>
+              <a:rPr lang="en-US" sz="2800" b="1" dirty="0">
+                <a:solidFill>
+                  <a:srgbClr val="1E2761"/>
+                </a:solidFill>
+                <a:latin typeface="Georgia" pitchFamily="34" charset="0"/>
+                <a:ea typeface="Georgia" pitchFamily="34" charset="-122"/>
+                <a:cs typeface="Georgia" pitchFamily="34" charset="-120"/>
+              </a:rPr>
+              <a:t>Efecto de la variante Black Top-Hat</a:t>
+            </a:r>
+            <a:endParaRPr lang="en-US" sz="2800" dirty="0"/>
+          </a:p>
+        </p:txBody>
+      </p:sp>
+      <p:sp>
+        <p:nvSpPr>
+          <p:cNvPr id="4" name="Shape 2"/>
+          <p:cNvSpPr/>
+          <p:nvPr/>
+        </p:nvSpPr>
+        <p:spPr>
+          <a:xfrm>
+            <a:off x="640080" y="960120"/>
+            <a:ext cx="10881360" cy="0"/>
+          </a:xfrm>
+          <a:prstGeom prst="line">
+            <a:avLst/>
+          </a:prstGeom>
+          <a:noFill/>
+          <a:ln w="19050">
+            <a:solidFill>
+              <a:srgbClr val="CADCFC"/>
+            </a:solidFill>
+            <a:prstDash val="solid"/>
+          </a:ln>
+        </p:spPr>
+        <p:txBody>
+          <a:bodyPr/>
+          <a:p/>
+        </p:txBody>
+      </p:sp>
+      <p:sp>
+        <p:nvSpPr>
+          <p:cNvPr id="5" name="Text 3"/>
+          <p:cNvSpPr/>
+          <p:nvPr/>
+        </p:nvSpPr>
+        <p:spPr>
+          <a:xfrm>
+            <a:off x="640080" y="6492240"/>
+            <a:ext cx="6400800" cy="274320"/>
+          </a:xfrm>
+          <a:prstGeom prst="rect">
+            <a:avLst/>
+          </a:prstGeom>
+          <a:noFill/>
+          <a:ln/>
+        </p:spPr>
+        <p:txBody>
+          <a:bodyPr wrap="square" lIns="0" tIns="0" rIns="0" bIns="0" rtlCol="0" anchor="ctr"/>
+          <a:lstStyle/>
+          <a:p>
+            <a:pPr indent="0" marL="0">
+              <a:buNone/>
+            </a:pPr>
+            <a:r>
+              <a:rPr lang="en-US" sz="1000" i="1" dirty="0">
+                <a:solidFill>
+                  <a:srgbClr val="64748B"/>
+                </a:solidFill>
+                <a:latin typeface="Calibri" pitchFamily="34" charset="0"/>
+                <a:ea typeface="Calibri" pitchFamily="34" charset="-122"/>
+                <a:cs typeface="Calibri" pitchFamily="34" charset="-120"/>
+              </a:rPr>
+              <a:t>Tesis Maestría en Ciencias de Datos — UCOM</a:t>
+            </a:r>
+            <a:endParaRPr lang="en-US" sz="1000" dirty="0"/>
+          </a:p>
+        </p:txBody>
+      </p:sp>
+      <p:sp>
+        <p:nvSpPr>
+          <p:cNvPr id="6" name="Text 4"/>
+          <p:cNvSpPr/>
+          <p:nvPr/>
+        </p:nvSpPr>
+        <p:spPr>
+          <a:xfrm>
+            <a:off x="11064240" y="6492240"/>
+            <a:ext cx="457200" cy="274320"/>
+          </a:xfrm>
+          <a:prstGeom prst="rect">
+            <a:avLst/>
+          </a:prstGeom>
+          <a:noFill/>
+          <a:ln/>
+        </p:spPr>
+        <p:txBody>
+          <a:bodyPr wrap="square" lIns="0" tIns="0" rIns="0" bIns="0" rtlCol="0" anchor="ctr"/>
+          <a:lstStyle/>
+          <a:p>
+            <a:pPr algn="r" indent="0" marL="0">
+              <a:buNone/>
+            </a:pPr>
+            <a:r>
+              <a:rPr lang="en-US" sz="1000" dirty="0">
+                <a:solidFill>
+                  <a:srgbClr val="64748B"/>
+                </a:solidFill>
+                <a:latin typeface="Calibri" pitchFamily="34" charset="0"/>
+                <a:ea typeface="Calibri" pitchFamily="34" charset="-122"/>
+                <a:cs typeface="Calibri" pitchFamily="34" charset="-120"/>
+              </a:rPr>
+              <a:t>16 / 20</a:t>
+            </a:r>
+            <a:endParaRPr lang="en-US" sz="1000" dirty="0"/>
+          </a:p>
+        </p:txBody>
+      </p:sp>
+      <p:pic>
+        <p:nvPicPr>
+          <p:cNvPr id="7" name="Image 0" descr="/sessions/modest-affectionate-curie/mnt/mastertesis/tesis_mciencias_datos/docs/figures/fig_heatmap_tophat.png">    </p:cNvPr>
+          <p:cNvPicPr>
+            <a:picLocks noChangeAspect="1"/>
+          </p:cNvPicPr>
+          <p:nvPr/>
+        </p:nvPicPr>
+        <p:blipFill>
+          <a:blip r:embed="rId2"/>
+          <a:stretch>
+            <a:fillRect/>
+          </a:stretch>
+        </p:blipFill>
+        <p:spPr>
+          <a:xfrm>
+            <a:off x="365760" y="1188720"/>
+            <a:ext cx="11430000" cy="4191000"/>
+          </a:xfrm>
+          <a:prstGeom prst="rect">
+            <a:avLst/>
+          </a:prstGeom>
+        </p:spPr>
+      </p:pic>
+      <p:sp>
+        <p:nvSpPr>
+          <p:cNvPr id="8" name="Text 5"/>
+          <p:cNvSpPr/>
+          <p:nvPr/>
+        </p:nvSpPr>
+        <p:spPr>
+          <a:xfrm>
+            <a:off x="640080" y="6263640"/>
+            <a:ext cx="10881360" cy="365760"/>
+          </a:xfrm>
+          <a:prstGeom prst="rect">
+            <a:avLst/>
+          </a:prstGeom>
+          <a:noFill/>
+          <a:ln/>
+        </p:spPr>
+        <p:txBody>
+          <a:bodyPr wrap="square" lIns="0" tIns="0" rIns="0" bIns="0" rtlCol="0" anchor="ctr"/>
+          <a:lstStyle/>
+          <a:p>
+            <a:pPr algn="ctr" indent="0" marL="0">
+              <a:buNone/>
+            </a:pPr>
+            <a:r>
+              <a:rPr lang="en-US" sz="1100" i="1" dirty="0">
+                <a:solidFill>
+                  <a:srgbClr val="1E2761"/>
+                </a:solidFill>
+                <a:latin typeface="Calibri" pitchFamily="34" charset="0"/>
+                <a:ea typeface="Calibri" pitchFamily="34" charset="-122"/>
+                <a:cs typeface="Calibri" pitchFamily="34" charset="-120"/>
+              </a:rPr>
+              <a:t>Añadir Black Top-Hat sube contraste y actividad (EN, SD, SF, MG) pero degrada la calidad (Qabf, SSIM, VIF, MI) y multiplica los artefactos (Nabf +427%). No se recomienda por defecto.</a:t>
+            </a:r>
+            <a:endParaRPr lang="en-US" sz="1100" dirty="0"/>
+          </a:p>
+        </p:txBody>
+      </p:sp>
+    </p:spTree>
+  </p:cSld>
+  <p:clrMapOvr>
+    <a:masterClrMapping/>
+  </p:clrMapOvr>
+</p:sld>
+</file>
+
+<file path=ppt/slides/slide17.xml><?xml version="1.0" encoding="utf-8"?>
 <p:sld xmlns:a="http://schemas.openxmlformats.org/drawingml/2006/main" xmlns:r="http://schemas.openxmlformats.org/officeDocument/2006/relationships" xmlns:p="http://schemas.openxmlformats.org/presentationml/2006/main">
   <p:cSld name="Slide 15">
     <p:bg>
@@ -10796,6 +11352,10 @@
           </a:solidFill>
           <a:ln/>
         </p:spPr>
+        <p:txBody>
+          <a:bodyPr/>
+          <a:p/>
+        </p:txBody>
       </p:sp>
       <p:sp>
         <p:nvSpPr>
@@ -10858,6 +11418,10 @@
             <a:prstDash val="solid"/>
           </a:ln>
         </p:spPr>
+        <p:txBody>
+          <a:bodyPr/>
+          <a:p/>
+        </p:txBody>
       </p:sp>
       <p:sp>
         <p:nvSpPr>
@@ -10931,7 +11495,7 @@
                 <a:ea typeface="Calibri" pitchFamily="34" charset="-122"/>
                 <a:cs typeface="Calibri" pitchFamily="34" charset="-120"/>
               </a:rPr>
-              <a:t>15 / 18</a:t>
+              <a:t>17 / 20</a:t>
             </a:r>
             <a:endParaRPr lang="en-US" sz="1000" dirty="0"/>
           </a:p>
@@ -10968,6 +11532,10 @@
             </a:outerShdw>
           </a:effectLst>
         </p:spPr>
+        <p:txBody>
+          <a:bodyPr/>
+          <a:p/>
+        </p:txBody>
       </p:sp>
       <p:sp>
         <p:nvSpPr>
@@ -10988,6 +11556,10 @@
           </a:solidFill>
           <a:ln/>
         </p:spPr>
+        <p:txBody>
+          <a:bodyPr/>
+          <a:p/>
+        </p:txBody>
       </p:sp>
       <p:sp>
         <p:nvSpPr>
@@ -11100,7 +11672,7 @@
                 <a:ea typeface="Calibri" pitchFamily="34" charset="-122"/>
                 <a:cs typeface="Calibri" pitchFamily="34" charset="-120"/>
               </a:rPr>
-              <a:t>Obtiene el menor ranking global (2.03), liderando EN, SD, FE y MI_vis. Curvelet sobresale en MG y Promedio en MI_ir per-imagen, pero Laplace domina el equilibrio entre métricas.</a:t>
+              <a:t>Encabeza el ranking agregado (4.42) por su ventaja en contraste (SD) y fidelidad perceptual (VIF). No domina en fidelidad estructural.</a:t>
             </a:r>
             <a:endParaRPr lang="en-US" sz="1200" dirty="0"/>
           </a:p>
@@ -11137,6 +11709,10 @@
             </a:outerShdw>
           </a:effectLst>
         </p:spPr>
+        <p:txBody>
+          <a:bodyPr/>
+          <a:p/>
+        </p:txBody>
       </p:sp>
       <p:sp>
         <p:nvSpPr>
@@ -11157,6 +11733,10 @@
           </a:solidFill>
           <a:ln/>
         </p:spPr>
+        <p:txBody>
+          <a:bodyPr/>
+          <a:p/>
+        </p:txBody>
       </p:sp>
       <p:sp>
         <p:nvSpPr>
@@ -11230,7 +11810,7 @@
                 <a:ea typeface="Georgia" pitchFamily="34" charset="-122"/>
                 <a:cs typeface="Georgia" pitchFamily="34" charset="-120"/>
               </a:rPr>
-              <a:t>Torre Top-Hat compite, no domina</a:t>
+              <a:t>Torre Top-Hat: fortalezas complementarias</a:t>
             </a:r>
             <a:endParaRPr lang="en-US" sz="1400" dirty="0"/>
           </a:p>
@@ -11269,7 +11849,7 @@
                 <a:ea typeface="Calibri" pitchFamily="34" charset="-122"/>
                 <a:cs typeface="Calibri" pitchFamily="34" charset="-120"/>
               </a:rPr>
-              <a:t>Mejor configuración disco-L=5 ranking 3.28; familia entera entre 3.28 y 4.82. Por delante de Curvelet y Promedio en el promedio global.</a:t>
+              <a:t>Mejor config. disco L=5 (2° global, 5.00). Supera a Laplace en SSIM y SCD (significativo); iguala en Qabf y Nabf.</a:t>
             </a:r>
             <a:endParaRPr lang="en-US" sz="1200" dirty="0"/>
           </a:p>
@@ -11306,6 +11886,10 @@
             </a:outerShdw>
           </a:effectLst>
         </p:spPr>
+        <p:txBody>
+          <a:bodyPr/>
+          <a:p/>
+        </p:txBody>
       </p:sp>
       <p:sp>
         <p:nvSpPr>
@@ -11326,6 +11910,10 @@
           </a:solidFill>
           <a:ln/>
         </p:spPr>
+        <p:txBody>
+          <a:bodyPr/>
+          <a:p/>
+        </p:txBody>
       </p:sp>
       <p:sp>
         <p:nvSpPr>
@@ -11475,6 +12063,10 @@
             </a:outerShdw>
           </a:effectLst>
         </p:spPr>
+        <p:txBody>
+          <a:bodyPr/>
+          <a:p/>
+        </p:txBody>
       </p:sp>
       <p:sp>
         <p:nvSpPr>
@@ -11495,6 +12087,10 @@
           </a:solidFill>
           <a:ln/>
         </p:spPr>
+        <p:txBody>
+          <a:bodyPr/>
+          <a:p/>
+        </p:txBody>
       </p:sp>
       <p:sp>
         <p:nvSpPr>
@@ -11621,7 +12217,7 @@
 </p:sld>
 </file>
 
-<file path=ppt/slides/slide16.xml><?xml version="1.0" encoding="utf-8"?>
+<file path=ppt/slides/slide18.xml><?xml version="1.0" encoding="utf-8"?>
 <p:sld xmlns:a="http://schemas.openxmlformats.org/drawingml/2006/main" xmlns:r="http://schemas.openxmlformats.org/officeDocument/2006/relationships" xmlns:p="http://schemas.openxmlformats.org/presentationml/2006/main">
   <p:cSld name="Slide 16">
     <p:bg>
@@ -11664,6 +12260,10 @@
           </a:solidFill>
           <a:ln/>
         </p:spPr>
+        <p:txBody>
+          <a:bodyPr/>
+          <a:p/>
+        </p:txBody>
       </p:sp>
       <p:sp>
         <p:nvSpPr>
@@ -11726,6 +12326,10 @@
             <a:prstDash val="solid"/>
           </a:ln>
         </p:spPr>
+        <p:txBody>
+          <a:bodyPr/>
+          <a:p/>
+        </p:txBody>
       </p:sp>
       <p:sp>
         <p:nvSpPr>
@@ -11799,7 +12403,7 @@
                 <a:ea typeface="Calibri" pitchFamily="34" charset="-122"/>
                 <a:cs typeface="Calibri" pitchFamily="34" charset="-120"/>
               </a:rPr>
-              <a:t>16 / 18</a:t>
+              <a:t>18 / 20</a:t>
             </a:r>
             <a:endParaRPr lang="en-US" sz="1000" dirty="0"/>
           </a:p>
@@ -11824,6 +12428,10 @@
           </a:solidFill>
           <a:ln/>
         </p:spPr>
+        <p:txBody>
+          <a:bodyPr/>
+          <a:p/>
+        </p:txBody>
       </p:sp>
       <p:sp>
         <p:nvSpPr>
@@ -11897,7 +12505,7 @@
                 <a:ea typeface="Calibri" pitchFamily="34" charset="-122"/>
                 <a:cs typeface="Calibri" pitchFamily="34" charset="-120"/>
               </a:rPr>
-              <a:t>La Torre Top-Hat es un método de fusión VIS+IR competitivo: ranking global 3.28 en su mejor variante (disco L=5).</a:t>
+              <a:t>La Torre Top-Hat (modo WTH) supera a la Pirámide de Laplace en fidelidad estructural (SSIM, SCD) e iguala en preservación de bordes (Qabf, Nabf). Mejor config.: disco L=5.</a:t>
             </a:r>
             <a:endParaRPr lang="en-US" sz="1300" dirty="0"/>
           </a:p>
@@ -11922,6 +12530,10 @@
           </a:solidFill>
           <a:ln/>
         </p:spPr>
+        <p:txBody>
+          <a:bodyPr/>
+          <a:p/>
+        </p:txBody>
       </p:sp>
       <p:sp>
         <p:nvSpPr>
@@ -11995,7 +12607,7 @@
                 <a:ea typeface="Calibri" pitchFamily="34" charset="-122"/>
                 <a:cs typeface="Calibri" pitchFamily="34" charset="-120"/>
               </a:rPr>
-              <a:t>La pirámide de Laplace es el método más equilibrado del estudio (ranking 2.03), líder en EN, SD, FE y MI_vis.</a:t>
+              <a:t>La Pirámide de Laplace logra el mejor ranking agregado (4.42) por contraste y VIF; Curvelet resulta el más débil al penalizar artefactos (Nabf).</a:t>
             </a:r>
             <a:endParaRPr lang="en-US" sz="1300" dirty="0"/>
           </a:p>
@@ -12020,6 +12632,10 @@
           </a:solidFill>
           <a:ln/>
         </p:spPr>
+        <p:txBody>
+          <a:bodyPr/>
+          <a:p/>
+        </p:txBody>
       </p:sp>
       <p:sp>
         <p:nvSpPr>
@@ -12093,7 +12709,7 @@
                 <a:ea typeface="Calibri" pitchFamily="34" charset="-122"/>
                 <a:cs typeface="Calibri" pitchFamily="34" charset="-120"/>
               </a:rPr>
-              <a:t>Las diferencias son estadísticamente robustas: Friedman p &lt;&lt; 0.001 en las 6 métricas; Wilcoxon pareado confirma las superioridades específicas.</a:t>
+              <a:t>Diferencias estadísticamente robustas: Friedman p &lt;&lt; 0,001 en las 12 métricas; Wilcoxon con corrección de Holm y tamaño de efecto.</a:t>
             </a:r>
             <a:endParaRPr lang="en-US" sz="1300" dirty="0"/>
           </a:p>
@@ -12118,6 +12734,10 @@
           </a:solidFill>
           <a:ln/>
         </p:spPr>
+        <p:txBody>
+          <a:bodyPr/>
+          <a:p/>
+        </p:txBody>
       </p:sp>
       <p:sp>
         <p:nvSpPr>
@@ -12191,7 +12811,7 @@
                 <a:ea typeface="Calibri" pitchFamily="34" charset="-122"/>
                 <a:cs typeface="Calibri" pitchFamily="34" charset="-120"/>
               </a:rPr>
-              <a:t>La métrica de información mutua tiene sesgo de linealidad: el promedio simple compite en MI per-imagen sin que ello implique mejor fusión visual; se recomienda reportarla siempre con métricas de calidad global.</a:t>
+              <a:t>La variante Black Top-Hat aumenta el contraste pero degrada la calidad (Qabf, SSIM, VIF) y multiplica los artefactos (Nabf ×5): no se recomienda por defecto.</a:t>
             </a:r>
             <a:endParaRPr lang="en-US" sz="1300" dirty="0"/>
           </a:p>
@@ -12216,6 +12836,10 @@
           </a:solidFill>
           <a:ln/>
         </p:spPr>
+        <p:txBody>
+          <a:bodyPr/>
+          <a:p/>
+        </p:txBody>
       </p:sp>
       <p:sp>
         <p:nvSpPr>
@@ -12303,7 +12927,7 @@
 </p:sld>
 </file>
 
-<file path=ppt/slides/slide17.xml><?xml version="1.0" encoding="utf-8"?>
+<file path=ppt/slides/slide19.xml><?xml version="1.0" encoding="utf-8"?>
 <p:sld xmlns:a="http://schemas.openxmlformats.org/drawingml/2006/main" xmlns:r="http://schemas.openxmlformats.org/officeDocument/2006/relationships" xmlns:p="http://schemas.openxmlformats.org/presentationml/2006/main">
   <p:cSld name="Slide 17">
     <p:bg>
@@ -12346,6 +12970,10 @@
           </a:solidFill>
           <a:ln/>
         </p:spPr>
+        <p:txBody>
+          <a:bodyPr/>
+          <a:p/>
+        </p:txBody>
       </p:sp>
       <p:sp>
         <p:nvSpPr>
@@ -12408,6 +13036,10 @@
             <a:prstDash val="solid"/>
           </a:ln>
         </p:spPr>
+        <p:txBody>
+          <a:bodyPr/>
+          <a:p/>
+        </p:txBody>
       </p:sp>
       <p:sp>
         <p:nvSpPr>
@@ -12481,7 +13113,7 @@
                 <a:ea typeface="Calibri" pitchFamily="34" charset="-122"/>
                 <a:cs typeface="Calibri" pitchFamily="34" charset="-120"/>
               </a:rPr>
-              <a:t>17 / 18</a:t>
+              <a:t>19 / 20</a:t>
             </a:r>
             <a:endParaRPr lang="en-US" sz="1000" dirty="0"/>
           </a:p>
@@ -12518,6 +13150,10 @@
             </a:outerShdw>
           </a:effectLst>
         </p:spPr>
+        <p:txBody>
+          <a:bodyPr/>
+          <a:p/>
+        </p:txBody>
       </p:sp>
       <p:sp>
         <p:nvSpPr>
@@ -12538,6 +13174,10 @@
           </a:solidFill>
           <a:ln/>
         </p:spPr>
+        <p:txBody>
+          <a:bodyPr/>
+          <a:p/>
+        </p:txBody>
       </p:sp>
       <p:sp>
         <p:nvSpPr>
@@ -12654,49 +13294,7 @@
                 <a:ea typeface="Calibri" pitchFamily="34" charset="-122"/>
                 <a:cs typeface="Calibri" pitchFamily="34" charset="-120"/>
               </a:rPr>
-              <a:t>Activar Black Top-Hat (BTH) en el benchmark exhaustivo y comparar con la variante WTH solamente.</a:t>
-            </a:r>
-            <a:endParaRPr lang="en-US" sz="1200" dirty="0"/>
-          </a:p>
-          <a:p>
-            <a:pPr marL="342900" indent="-342900">
-              <a:spcAft>
-                <a:spcPts val="800"/>
-              </a:spcAft>
-              <a:buSzPct val="100000"/>
-              <a:buChar char="•"/>
-            </a:pPr>
-            <a:r>
-              <a:rPr lang="en-US" sz="1200" dirty="0">
-                <a:solidFill>
-                  <a:srgbClr val="1F2937"/>
-                </a:solidFill>
-                <a:latin typeface="Calibri" pitchFamily="34" charset="0"/>
-                <a:ea typeface="Calibri" pitchFamily="34" charset="-122"/>
-                <a:cs typeface="Calibri" pitchFamily="34" charset="-120"/>
-              </a:rPr>
-              <a:t>Repetir el estudio con un segundo dataset (RoadScene o M3FD) para evaluar transferibilidad.</a:t>
-            </a:r>
-            <a:endParaRPr lang="en-US" sz="1200" dirty="0"/>
-          </a:p>
-          <a:p>
-            <a:pPr marL="342900" indent="-342900">
-              <a:spcAft>
-                <a:spcPts val="800"/>
-              </a:spcAft>
-              <a:buSzPct val="100000"/>
-              <a:buChar char="•"/>
-            </a:pPr>
-            <a:r>
-              <a:rPr lang="en-US" sz="1200" dirty="0">
-                <a:solidFill>
-                  <a:srgbClr val="1F2937"/>
-                </a:solidFill>
-                <a:latin typeface="Calibri" pitchFamily="34" charset="0"/>
-                <a:ea typeface="Calibri" pitchFamily="34" charset="-122"/>
-                <a:cs typeface="Calibri" pitchFamily="34" charset="-120"/>
-              </a:rPr>
-              <a:t>Generar mosaicos cualitativos finales (selección curada de 6-8 ejemplos para la tesis).</a:t>
+              <a:t>Hecho: variante WTH+BTH evaluada (sube contraste, baja calidad). Probar reglas que usen el BTH de forma selectiva sin introducir artefactos.</a:t>
             </a:r>
             <a:endParaRPr lang="en-US" sz="1200" dirty="0"/>
           </a:p>
@@ -12733,6 +13331,10 @@
             </a:outerShdw>
           </a:effectLst>
         </p:spPr>
+        <p:txBody>
+          <a:bodyPr/>
+          <a:p/>
+        </p:txBody>
       </p:sp>
       <p:sp>
         <p:nvSpPr>
@@ -12753,6 +13355,10 @@
           </a:solidFill>
           <a:ln/>
         </p:spPr>
+        <p:txBody>
+          <a:bodyPr/>
+          <a:p/>
+        </p:txBody>
       </p:sp>
       <p:sp>
         <p:nvSpPr>
@@ -12948,6 +13554,10 @@
             </a:outerShdw>
           </a:effectLst>
         </p:spPr>
+        <p:txBody>
+          <a:bodyPr/>
+          <a:p/>
+        </p:txBody>
       </p:sp>
       <p:sp>
         <p:nvSpPr>
@@ -12968,6 +13578,10 @@
           </a:solidFill>
           <a:ln/>
         </p:spPr>
+        <p:txBody>
+          <a:bodyPr/>
+          <a:p/>
+        </p:txBody>
       </p:sp>
       <p:sp>
         <p:nvSpPr>
@@ -13129,228 +13743,6 @@
               <a:t>Preparación de defensa.</a:t>
             </a:r>
             <a:endParaRPr lang="en-US" sz="1200" dirty="0"/>
-          </a:p>
-        </p:txBody>
-      </p:sp>
-    </p:spTree>
-  </p:cSld>
-  <p:clrMapOvr>
-    <a:masterClrMapping/>
-  </p:clrMapOvr>
-</p:sld>
-</file>
-
-<file path=ppt/slides/slide18.xml><?xml version="1.0" encoding="utf-8"?>
-<p:sld xmlns:a="http://schemas.openxmlformats.org/drawingml/2006/main" xmlns:r="http://schemas.openxmlformats.org/officeDocument/2006/relationships" xmlns:p="http://schemas.openxmlformats.org/presentationml/2006/main">
-  <p:cSld name="Slide 18">
-    <p:bg>
-      <p:bgPr>
-        <a:solidFill>
-          <a:srgbClr val="1E2761"/>
-        </a:solidFill>
-      </p:bgPr>
-    </p:bg>
-    <p:spTree>
-      <p:nvGrpSpPr>
-        <p:cNvPr id="1" name=""/>
-        <p:cNvGrpSpPr/>
-        <p:nvPr/>
-      </p:nvGrpSpPr>
-      <p:grpSpPr>
-        <a:xfrm>
-          <a:off x="0" y="0"/>
-          <a:ext cx="0" cy="0"/>
-          <a:chOff x="0" y="0"/>
-          <a:chExt cx="0" cy="0"/>
-        </a:xfrm>
-      </p:grpSpPr>
-      <p:sp>
-        <p:nvSpPr>
-          <p:cNvPr id="2" name="Shape 0"/>
-          <p:cNvSpPr/>
-          <p:nvPr/>
-        </p:nvSpPr>
-        <p:spPr>
-          <a:xfrm>
-            <a:off x="0" y="0"/>
-            <a:ext cx="228600" cy="6858000"/>
-          </a:xfrm>
-          <a:prstGeom prst="rect">
-            <a:avLst/>
-          </a:prstGeom>
-          <a:solidFill>
-            <a:srgbClr val="D4A017"/>
-          </a:solidFill>
-          <a:ln/>
-        </p:spPr>
-      </p:sp>
-      <p:sp>
-        <p:nvSpPr>
-          <p:cNvPr id="3" name="Text 1"/>
-          <p:cNvSpPr/>
-          <p:nvPr/>
-        </p:nvSpPr>
-        <p:spPr>
-          <a:xfrm>
-            <a:off x="640080" y="2286000"/>
-            <a:ext cx="10972800" cy="1371600"/>
-          </a:xfrm>
-          <a:prstGeom prst="rect">
-            <a:avLst/>
-          </a:prstGeom>
-          <a:noFill/>
-          <a:ln/>
-        </p:spPr>
-        <p:txBody>
-          <a:bodyPr wrap="square" lIns="0" tIns="0" rIns="0" bIns="0" rtlCol="0" anchor="ctr"/>
-          <a:lstStyle/>
-          <a:p>
-            <a:pPr algn="ctr" indent="0" marL="0">
-              <a:buNone/>
-            </a:pPr>
-            <a:r>
-              <a:rPr lang="en-US" sz="8000" b="1" dirty="0">
-                <a:solidFill>
-                  <a:srgbClr val="FFFFFF"/>
-                </a:solidFill>
-                <a:latin typeface="Georgia" pitchFamily="34" charset="0"/>
-                <a:ea typeface="Georgia" pitchFamily="34" charset="-122"/>
-                <a:cs typeface="Georgia" pitchFamily="34" charset="-120"/>
-              </a:rPr>
-              <a:t>¡Gracias!</a:t>
-            </a:r>
-            <a:endParaRPr lang="en-US" sz="8000" dirty="0"/>
-          </a:p>
-        </p:txBody>
-      </p:sp>
-      <p:sp>
-        <p:nvSpPr>
-          <p:cNvPr id="4" name="Text 2"/>
-          <p:cNvSpPr/>
-          <p:nvPr/>
-        </p:nvSpPr>
-        <p:spPr>
-          <a:xfrm>
-            <a:off x="640080" y="3931920"/>
-            <a:ext cx="10972800" cy="548640"/>
-          </a:xfrm>
-          <a:prstGeom prst="rect">
-            <a:avLst/>
-          </a:prstGeom>
-          <a:noFill/>
-          <a:ln/>
-        </p:spPr>
-        <p:txBody>
-          <a:bodyPr wrap="square" lIns="0" tIns="0" rIns="0" bIns="0" rtlCol="0" anchor="ctr"/>
-          <a:lstStyle/>
-          <a:p>
-            <a:pPr algn="ctr" indent="0" marL="0">
-              <a:buNone/>
-            </a:pPr>
-            <a:r>
-              <a:rPr lang="en-US" sz="2800" i="1" dirty="0">
-                <a:solidFill>
-                  <a:srgbClr val="CADCFC"/>
-                </a:solidFill>
-                <a:latin typeface="Georgia" pitchFamily="34" charset="0"/>
-                <a:ea typeface="Georgia" pitchFamily="34" charset="-122"/>
-                <a:cs typeface="Georgia" pitchFamily="34" charset="-120"/>
-              </a:rPr>
-              <a:t>Discusión y comentarios</a:t>
-            </a:r>
-            <a:endParaRPr lang="en-US" sz="2800" dirty="0"/>
-          </a:p>
-        </p:txBody>
-      </p:sp>
-      <p:sp>
-        <p:nvSpPr>
-          <p:cNvPr id="5" name="Shape 3"/>
-          <p:cNvSpPr/>
-          <p:nvPr/>
-        </p:nvSpPr>
-        <p:spPr>
-          <a:xfrm>
-            <a:off x="5166360" y="4754880"/>
-            <a:ext cx="1828800" cy="0"/>
-          </a:xfrm>
-          <a:prstGeom prst="line">
-            <a:avLst/>
-          </a:prstGeom>
-          <a:noFill/>
-          <a:ln w="38100">
-            <a:solidFill>
-              <a:srgbClr val="D4A017"/>
-            </a:solidFill>
-            <a:prstDash val="solid"/>
-          </a:ln>
-        </p:spPr>
-      </p:sp>
-      <p:sp>
-        <p:nvSpPr>
-          <p:cNvPr id="6" name="Text 4"/>
-          <p:cNvSpPr/>
-          <p:nvPr/>
-        </p:nvSpPr>
-        <p:spPr>
-          <a:xfrm>
-            <a:off x="640080" y="5120640"/>
-            <a:ext cx="10972800" cy="1371600"/>
-          </a:xfrm>
-          <a:prstGeom prst="rect">
-            <a:avLst/>
-          </a:prstGeom>
-          <a:noFill/>
-          <a:ln/>
-        </p:spPr>
-        <p:txBody>
-          <a:bodyPr wrap="square" lIns="0" tIns="0" rIns="0" bIns="0" rtlCol="0" anchor="t"/>
-          <a:lstStyle/>
-          <a:p>
-            <a:pPr algn="ctr" indent="0" marL="0">
-              <a:buNone/>
-            </a:pPr>
-            <a:r>
-              <a:rPr lang="en-US" sz="1600" dirty="0">
-                <a:solidFill>
-                  <a:srgbClr val="FFFFFF"/>
-                </a:solidFill>
-                <a:latin typeface="Calibri" pitchFamily="34" charset="0"/>
-                <a:ea typeface="Calibri" pitchFamily="34" charset="-122"/>
-                <a:cs typeface="Calibri" pitchFamily="34" charset="-120"/>
-              </a:rPr>
-              <a:t>Lic. Juan Pablo Bazán   ·   Ing. Yan Bajac
-</a:t>
-            </a:r>
-            <a:pPr algn="ctr" indent="0" marL="0">
-              <a:buNone/>
-            </a:pPr>
-            <a:r>
-              <a:rPr lang="en-US" sz="1400" dirty="0">
-                <a:solidFill>
-                  <a:srgbClr val="CADCFC"/>
-                </a:solidFill>
-                <a:latin typeface="Calibri" pitchFamily="34" charset="0"/>
-                <a:ea typeface="Calibri" pitchFamily="34" charset="-122"/>
-                <a:cs typeface="Calibri" pitchFamily="34" charset="-120"/>
-              </a:rPr>
-              <a:t>Director: D.Sc. Julio César Mello
-</a:t>
-            </a:r>
-            <a:pPr algn="ctr" indent="0" marL="0">
-              <a:buNone/>
-            </a:pPr>
-            <a:r>
-              <a:rPr lang="en-US" sz="1200" i="1" dirty="0">
-                <a:solidFill>
-                  <a:srgbClr val="CADCFC"/>
-                </a:solidFill>
-                <a:latin typeface="Calibri" pitchFamily="34" charset="0"/>
-                <a:ea typeface="Calibri" pitchFamily="34" charset="-122"/>
-                <a:cs typeface="Calibri" pitchFamily="34" charset="-120"/>
-              </a:rPr>
-              <a:t>UCOM — Maestría en Ciencias de Datos · 2026</a:t>
-            </a:r>
-            <a:endParaRPr lang="en-US" sz="1600" dirty="0"/>
           </a:p>
         </p:txBody>
       </p:sp>
@@ -13405,6 +13797,10 @@
           </a:solidFill>
           <a:ln/>
         </p:spPr>
+        <p:txBody>
+          <a:bodyPr/>
+          <a:p/>
+        </p:txBody>
       </p:sp>
       <p:sp>
         <p:nvSpPr>
@@ -13467,6 +13863,10 @@
             <a:prstDash val="solid"/>
           </a:ln>
         </p:spPr>
+        <p:txBody>
+          <a:bodyPr/>
+          <a:p/>
+        </p:txBody>
       </p:sp>
       <p:sp>
         <p:nvSpPr>
@@ -13540,7 +13940,7 @@
                 <a:ea typeface="Calibri" pitchFamily="34" charset="-122"/>
                 <a:cs typeface="Calibri" pitchFamily="34" charset="-120"/>
               </a:rPr>
-              <a:t>2 / 18</a:t>
+              <a:t>2 / 20</a:t>
             </a:r>
             <a:endParaRPr lang="en-US" sz="1000" dirty="0"/>
           </a:p>
@@ -13565,6 +13965,10 @@
           </a:solidFill>
           <a:ln/>
         </p:spPr>
+        <p:txBody>
+          <a:bodyPr/>
+          <a:p/>
+        </p:txBody>
       </p:sp>
       <p:sp>
         <p:nvSpPr>
@@ -13663,6 +14067,10 @@
           </a:solidFill>
           <a:ln/>
         </p:spPr>
+        <p:txBody>
+          <a:bodyPr/>
+          <a:p/>
+        </p:txBody>
       </p:sp>
       <p:sp>
         <p:nvSpPr>
@@ -13761,6 +14169,10 @@
           </a:solidFill>
           <a:ln/>
         </p:spPr>
+        <p:txBody>
+          <a:bodyPr/>
+          <a:p/>
+        </p:txBody>
       </p:sp>
       <p:sp>
         <p:nvSpPr>
@@ -13859,6 +14271,10 @@
           </a:solidFill>
           <a:ln/>
         </p:spPr>
+        <p:txBody>
+          <a:bodyPr/>
+          <a:p/>
+        </p:txBody>
       </p:sp>
       <p:sp>
         <p:nvSpPr>
@@ -13957,6 +14373,10 @@
           </a:solidFill>
           <a:ln/>
         </p:spPr>
+        <p:txBody>
+          <a:bodyPr/>
+          <a:p/>
+        </p:txBody>
       </p:sp>
       <p:sp>
         <p:nvSpPr>
@@ -14055,6 +14475,10 @@
           </a:solidFill>
           <a:ln/>
         </p:spPr>
+        <p:txBody>
+          <a:bodyPr/>
+          <a:p/>
+        </p:txBody>
       </p:sp>
       <p:sp>
         <p:nvSpPr>
@@ -14153,6 +14577,10 @@
           </a:solidFill>
           <a:ln/>
         </p:spPr>
+        <p:txBody>
+          <a:bodyPr/>
+          <a:p/>
+        </p:txBody>
       </p:sp>
       <p:sp>
         <p:nvSpPr>
@@ -14229,6 +14657,236 @@
               <a:t>Conclusiones y próximos pasos</a:t>
             </a:r>
             <a:endParaRPr lang="en-US" sz="1800" dirty="0"/>
+          </a:p>
+        </p:txBody>
+      </p:sp>
+    </p:spTree>
+  </p:cSld>
+  <p:clrMapOvr>
+    <a:masterClrMapping/>
+  </p:clrMapOvr>
+</p:sld>
+</file>
+
+<file path=ppt/slides/slide20.xml><?xml version="1.0" encoding="utf-8"?>
+<p:sld xmlns:a="http://schemas.openxmlformats.org/drawingml/2006/main" xmlns:r="http://schemas.openxmlformats.org/officeDocument/2006/relationships" xmlns:p="http://schemas.openxmlformats.org/presentationml/2006/main">
+  <p:cSld name="Slide 18">
+    <p:bg>
+      <p:bgPr>
+        <a:solidFill>
+          <a:srgbClr val="1E2761"/>
+        </a:solidFill>
+      </p:bgPr>
+    </p:bg>
+    <p:spTree>
+      <p:nvGrpSpPr>
+        <p:cNvPr id="1" name=""/>
+        <p:cNvGrpSpPr/>
+        <p:nvPr/>
+      </p:nvGrpSpPr>
+      <p:grpSpPr>
+        <a:xfrm>
+          <a:off x="0" y="0"/>
+          <a:ext cx="0" cy="0"/>
+          <a:chOff x="0" y="0"/>
+          <a:chExt cx="0" cy="0"/>
+        </a:xfrm>
+      </p:grpSpPr>
+      <p:sp>
+        <p:nvSpPr>
+          <p:cNvPr id="2" name="Shape 0"/>
+          <p:cNvSpPr/>
+          <p:nvPr/>
+        </p:nvSpPr>
+        <p:spPr>
+          <a:xfrm>
+            <a:off x="0" y="0"/>
+            <a:ext cx="228600" cy="6858000"/>
+          </a:xfrm>
+          <a:prstGeom prst="rect">
+            <a:avLst/>
+          </a:prstGeom>
+          <a:solidFill>
+            <a:srgbClr val="D4A017"/>
+          </a:solidFill>
+          <a:ln/>
+        </p:spPr>
+        <p:txBody>
+          <a:bodyPr/>
+          <a:p/>
+        </p:txBody>
+      </p:sp>
+      <p:sp>
+        <p:nvSpPr>
+          <p:cNvPr id="3" name="Text 1"/>
+          <p:cNvSpPr/>
+          <p:nvPr/>
+        </p:nvSpPr>
+        <p:spPr>
+          <a:xfrm>
+            <a:off x="640080" y="2286000"/>
+            <a:ext cx="10972800" cy="1371600"/>
+          </a:xfrm>
+          <a:prstGeom prst="rect">
+            <a:avLst/>
+          </a:prstGeom>
+          <a:noFill/>
+          <a:ln/>
+        </p:spPr>
+        <p:txBody>
+          <a:bodyPr wrap="square" lIns="0" tIns="0" rIns="0" bIns="0" rtlCol="0" anchor="ctr"/>
+          <a:lstStyle/>
+          <a:p>
+            <a:pPr algn="ctr" indent="0" marL="0">
+              <a:buNone/>
+            </a:pPr>
+            <a:r>
+              <a:rPr lang="en-US" sz="8000" b="1" dirty="0">
+                <a:solidFill>
+                  <a:srgbClr val="FFFFFF"/>
+                </a:solidFill>
+                <a:latin typeface="Georgia" pitchFamily="34" charset="0"/>
+                <a:ea typeface="Georgia" pitchFamily="34" charset="-122"/>
+                <a:cs typeface="Georgia" pitchFamily="34" charset="-120"/>
+              </a:rPr>
+              <a:t>¡Gracias!</a:t>
+            </a:r>
+            <a:endParaRPr lang="en-US" sz="8000" dirty="0"/>
+          </a:p>
+        </p:txBody>
+      </p:sp>
+      <p:sp>
+        <p:nvSpPr>
+          <p:cNvPr id="4" name="Text 2"/>
+          <p:cNvSpPr/>
+          <p:nvPr/>
+        </p:nvSpPr>
+        <p:spPr>
+          <a:xfrm>
+            <a:off x="640080" y="3931920"/>
+            <a:ext cx="10972800" cy="548640"/>
+          </a:xfrm>
+          <a:prstGeom prst="rect">
+            <a:avLst/>
+          </a:prstGeom>
+          <a:noFill/>
+          <a:ln/>
+        </p:spPr>
+        <p:txBody>
+          <a:bodyPr wrap="square" lIns="0" tIns="0" rIns="0" bIns="0" rtlCol="0" anchor="ctr"/>
+          <a:lstStyle/>
+          <a:p>
+            <a:pPr algn="ctr" indent="0" marL="0">
+              <a:buNone/>
+            </a:pPr>
+            <a:r>
+              <a:rPr lang="en-US" sz="2800" i="1" dirty="0">
+                <a:solidFill>
+                  <a:srgbClr val="CADCFC"/>
+                </a:solidFill>
+                <a:latin typeface="Georgia" pitchFamily="34" charset="0"/>
+                <a:ea typeface="Georgia" pitchFamily="34" charset="-122"/>
+                <a:cs typeface="Georgia" pitchFamily="34" charset="-120"/>
+              </a:rPr>
+              <a:t>Discusión y comentarios</a:t>
+            </a:r>
+            <a:endParaRPr lang="en-US" sz="2800" dirty="0"/>
+          </a:p>
+        </p:txBody>
+      </p:sp>
+      <p:sp>
+        <p:nvSpPr>
+          <p:cNvPr id="5" name="Shape 3"/>
+          <p:cNvSpPr/>
+          <p:nvPr/>
+        </p:nvSpPr>
+        <p:spPr>
+          <a:xfrm>
+            <a:off x="5166360" y="4754880"/>
+            <a:ext cx="1828800" cy="0"/>
+          </a:xfrm>
+          <a:prstGeom prst="line">
+            <a:avLst/>
+          </a:prstGeom>
+          <a:noFill/>
+          <a:ln w="38100">
+            <a:solidFill>
+              <a:srgbClr val="D4A017"/>
+            </a:solidFill>
+            <a:prstDash val="solid"/>
+          </a:ln>
+        </p:spPr>
+        <p:txBody>
+          <a:bodyPr/>
+          <a:p/>
+        </p:txBody>
+      </p:sp>
+      <p:sp>
+        <p:nvSpPr>
+          <p:cNvPr id="6" name="Text 4"/>
+          <p:cNvSpPr/>
+          <p:nvPr/>
+        </p:nvSpPr>
+        <p:spPr>
+          <a:xfrm>
+            <a:off x="640080" y="5120640"/>
+            <a:ext cx="10972800" cy="1371600"/>
+          </a:xfrm>
+          <a:prstGeom prst="rect">
+            <a:avLst/>
+          </a:prstGeom>
+          <a:noFill/>
+          <a:ln/>
+        </p:spPr>
+        <p:txBody>
+          <a:bodyPr wrap="square" lIns="0" tIns="0" rIns="0" bIns="0" rtlCol="0" anchor="t"/>
+          <a:lstStyle/>
+          <a:p>
+            <a:pPr algn="ctr" indent="0" marL="0">
+              <a:buNone/>
+            </a:pPr>
+            <a:r>
+              <a:rPr lang="en-US" sz="1600" dirty="0">
+                <a:solidFill>
+                  <a:srgbClr val="FFFFFF"/>
+                </a:solidFill>
+                <a:latin typeface="Calibri" pitchFamily="34" charset="0"/>
+                <a:ea typeface="Calibri" pitchFamily="34" charset="-122"/>
+                <a:cs typeface="Calibri" pitchFamily="34" charset="-120"/>
+              </a:rPr>
+              <a:t>Lic. Juan Pablo Bazán   ·   Ing. Yan Bajac
+</a:t>
+            </a:r>
+            <a:pPr algn="ctr" indent="0" marL="0">
+              <a:buNone/>
+            </a:pPr>
+            <a:r>
+              <a:rPr lang="en-US" sz="1400" dirty="0">
+                <a:solidFill>
+                  <a:srgbClr val="CADCFC"/>
+                </a:solidFill>
+                <a:latin typeface="Calibri" pitchFamily="34" charset="0"/>
+                <a:ea typeface="Calibri" pitchFamily="34" charset="-122"/>
+                <a:cs typeface="Calibri" pitchFamily="34" charset="-120"/>
+              </a:rPr>
+              <a:t>Director: D.Sc. Julio César Mello
+</a:t>
+            </a:r>
+            <a:pPr algn="ctr" indent="0" marL="0">
+              <a:buNone/>
+            </a:pPr>
+            <a:r>
+              <a:rPr lang="en-US" sz="1200" i="1" dirty="0">
+                <a:solidFill>
+                  <a:srgbClr val="CADCFC"/>
+                </a:solidFill>
+                <a:latin typeface="Calibri" pitchFamily="34" charset="0"/>
+                <a:ea typeface="Calibri" pitchFamily="34" charset="-122"/>
+                <a:cs typeface="Calibri" pitchFamily="34" charset="-120"/>
+              </a:rPr>
+              <a:t>UCOM — Maestría en Ciencias de Datos · 2026</a:t>
+            </a:r>
+            <a:endParaRPr lang="en-US" sz="1600" dirty="0"/>
           </a:p>
         </p:txBody>
       </p:sp>
@@ -14283,6 +14941,10 @@
           </a:solidFill>
           <a:ln/>
         </p:spPr>
+        <p:txBody>
+          <a:bodyPr/>
+          <a:p/>
+        </p:txBody>
       </p:sp>
       <p:sp>
         <p:nvSpPr>
@@ -14345,6 +15007,10 @@
             <a:prstDash val="solid"/>
           </a:ln>
         </p:spPr>
+        <p:txBody>
+          <a:bodyPr/>
+          <a:p/>
+        </p:txBody>
       </p:sp>
       <p:sp>
         <p:nvSpPr>
@@ -14418,7 +15084,7 @@
                 <a:ea typeface="Calibri" pitchFamily="34" charset="-122"/>
                 <a:cs typeface="Calibri" pitchFamily="34" charset="-120"/>
               </a:rPr>
-              <a:t>3 / 18</a:t>
+              <a:t>3 / 20</a:t>
             </a:r>
             <a:endParaRPr lang="en-US" sz="1000" dirty="0"/>
           </a:p>
@@ -14579,6 +15245,10 @@
             </a:outerShdw>
           </a:effectLst>
         </p:spPr>
+        <p:txBody>
+          <a:bodyPr/>
+          <a:p/>
+        </p:txBody>
       </p:sp>
       <p:sp>
         <p:nvSpPr>
@@ -14599,6 +15269,10 @@
           </a:solidFill>
           <a:ln/>
         </p:spPr>
+        <p:txBody>
+          <a:bodyPr/>
+          <a:p/>
+        </p:txBody>
       </p:sp>
       <p:sp>
         <p:nvSpPr>
@@ -14814,6 +15488,10 @@
           </a:solidFill>
           <a:ln/>
         </p:spPr>
+        <p:txBody>
+          <a:bodyPr/>
+          <a:p/>
+        </p:txBody>
       </p:sp>
       <p:sp>
         <p:nvSpPr>
@@ -14876,6 +15554,10 @@
             <a:prstDash val="solid"/>
           </a:ln>
         </p:spPr>
+        <p:txBody>
+          <a:bodyPr/>
+          <a:p/>
+        </p:txBody>
       </p:sp>
       <p:sp>
         <p:nvSpPr>
@@ -14949,7 +15631,7 @@
                 <a:ea typeface="Calibri" pitchFamily="34" charset="-122"/>
                 <a:cs typeface="Calibri" pitchFamily="34" charset="-120"/>
               </a:rPr>
-              <a:t>4 / 18</a:t>
+              <a:t>4 / 20</a:t>
             </a:r>
             <a:endParaRPr lang="en-US" sz="1000" dirty="0"/>
           </a:p>
@@ -14986,6 +15668,10 @@
             </a:outerShdw>
           </a:effectLst>
         </p:spPr>
+        <p:txBody>
+          <a:bodyPr/>
+          <a:p/>
+        </p:txBody>
       </p:sp>
       <p:sp>
         <p:nvSpPr>
@@ -15006,6 +15692,10 @@
           </a:solidFill>
           <a:ln/>
         </p:spPr>
+        <p:txBody>
+          <a:bodyPr/>
+          <a:p/>
+        </p:txBody>
       </p:sp>
       <p:sp>
         <p:nvSpPr>
@@ -15143,6 +15833,10 @@
           </a:solidFill>
           <a:ln/>
         </p:spPr>
+        <p:txBody>
+          <a:bodyPr/>
+          <a:p/>
+        </p:txBody>
       </p:sp>
       <p:sp>
         <p:nvSpPr>
@@ -15241,6 +15935,10 @@
           </a:solidFill>
           <a:ln/>
         </p:spPr>
+        <p:txBody>
+          <a:bodyPr/>
+          <a:p/>
+        </p:txBody>
       </p:sp>
       <p:sp>
         <p:nvSpPr>
@@ -15339,6 +16037,10 @@
           </a:solidFill>
           <a:ln/>
         </p:spPr>
+        <p:txBody>
+          <a:bodyPr/>
+          <a:p/>
+        </p:txBody>
       </p:sp>
       <p:sp>
         <p:nvSpPr>
@@ -15437,6 +16139,10 @@
           </a:solidFill>
           <a:ln/>
         </p:spPr>
+        <p:txBody>
+          <a:bodyPr/>
+          <a:p/>
+        </p:txBody>
       </p:sp>
       <p:sp>
         <p:nvSpPr>
@@ -15567,6 +16273,10 @@
           </a:solidFill>
           <a:ln/>
         </p:spPr>
+        <p:txBody>
+          <a:bodyPr/>
+          <a:p/>
+        </p:txBody>
       </p:sp>
       <p:sp>
         <p:nvSpPr>
@@ -15629,6 +16339,10 @@
             <a:prstDash val="solid"/>
           </a:ln>
         </p:spPr>
+        <p:txBody>
+          <a:bodyPr/>
+          <a:p/>
+        </p:txBody>
       </p:sp>
       <p:sp>
         <p:nvSpPr>
@@ -15702,7 +16416,7 @@
                 <a:ea typeface="Calibri" pitchFamily="34" charset="-122"/>
                 <a:cs typeface="Calibri" pitchFamily="34" charset="-120"/>
               </a:rPr>
-              <a:t>5 / 18</a:t>
+              <a:t>5 / 20</a:t>
             </a:r>
             <a:endParaRPr lang="en-US" sz="1000" dirty="0"/>
           </a:p>
@@ -15884,6 +16598,10 @@
             </a:outerShdw>
           </a:effectLst>
         </p:spPr>
+        <p:txBody>
+          <a:bodyPr/>
+          <a:p/>
+        </p:txBody>
       </p:sp>
       <p:sp>
         <p:nvSpPr>
@@ -15999,6 +16717,10 @@
           </a:solidFill>
           <a:ln/>
         </p:spPr>
+        <p:txBody>
+          <a:bodyPr/>
+          <a:p/>
+        </p:txBody>
       </p:sp>
       <p:sp>
         <p:nvSpPr>
@@ -16058,6 +16780,10 @@
           </a:solidFill>
           <a:ln/>
         </p:spPr>
+        <p:txBody>
+          <a:bodyPr/>
+          <a:p/>
+        </p:txBody>
       </p:sp>
       <p:sp>
         <p:nvSpPr>
@@ -16117,6 +16843,10 @@
           </a:solidFill>
           <a:ln/>
         </p:spPr>
+        <p:txBody>
+          <a:bodyPr/>
+          <a:p/>
+        </p:txBody>
       </p:sp>
       <p:sp>
         <p:nvSpPr>
@@ -16137,6 +16867,10 @@
           </a:solidFill>
           <a:ln/>
         </p:spPr>
+        <p:txBody>
+          <a:bodyPr/>
+          <a:p/>
+        </p:txBody>
       </p:sp>
       <p:sp>
         <p:nvSpPr>
@@ -16267,6 +17001,10 @@
           </a:solidFill>
           <a:ln/>
         </p:spPr>
+        <p:txBody>
+          <a:bodyPr/>
+          <a:p/>
+        </p:txBody>
       </p:sp>
       <p:sp>
         <p:nvSpPr>
@@ -16329,6 +17067,10 @@
             <a:prstDash val="solid"/>
           </a:ln>
         </p:spPr>
+        <p:txBody>
+          <a:bodyPr/>
+          <a:p/>
+        </p:txBody>
       </p:sp>
       <p:sp>
         <p:nvSpPr>
@@ -16402,7 +17144,7 @@
                 <a:ea typeface="Calibri" pitchFamily="34" charset="-122"/>
                 <a:cs typeface="Calibri" pitchFamily="34" charset="-120"/>
               </a:rPr>
-              <a:t>6 / 18</a:t>
+              <a:t>6 / 20</a:t>
             </a:r>
             <a:endParaRPr lang="en-US" sz="1000" dirty="0"/>
           </a:p>
@@ -16463,6 +17205,10 @@
             </a:outerShdw>
           </a:effectLst>
         </p:spPr>
+        <p:txBody>
+          <a:bodyPr/>
+          <a:p/>
+        </p:txBody>
       </p:sp>
       <p:sp>
         <p:nvSpPr>
@@ -16522,6 +17268,10 @@
           </a:solidFill>
           <a:ln/>
         </p:spPr>
+        <p:txBody>
+          <a:bodyPr/>
+          <a:p/>
+        </p:txBody>
       </p:sp>
       <p:sp>
         <p:nvSpPr>
@@ -16630,6 +17380,10 @@
           </a:solidFill>
           <a:ln/>
         </p:spPr>
+        <p:txBody>
+          <a:bodyPr/>
+          <a:p/>
+        </p:txBody>
       </p:sp>
       <p:sp>
         <p:nvSpPr>
@@ -16752,7 +17506,7 @@
                 <a:ea typeface="Consolas" pitchFamily="34" charset="-122"/>
                 <a:cs typeface="Consolas" pitchFamily="34" charset="-120"/>
               </a:rPr>
-              <a:t>F = Σₖ WTHₖ_F  +  base_F</a:t>
+              <a:t>F = base_F + Σₖ WTHₖ − Σₖ BTHₖ</a:t>
             </a:r>
             <a:endParaRPr lang="en-US" sz="1400" dirty="0"/>
           </a:p>
@@ -16791,7 +17545,7 @@
                 <a:ea typeface="Calibri" pitchFamily="34" charset="-122"/>
                 <a:cs typeface="Calibri" pitchFamily="34" charset="-120"/>
               </a:rPr>
-              <a:t>Distinguir las dos reglas es metodológicamente crítico (ver sección 4).</a:t>
+              <a:t>Modo WTH (por defecto): el término BTH es nulo. Modo WTH+BTH: el detalle oscuro se resta. Separar detalle y base es crítico.</a:t>
             </a:r>
             <a:endParaRPr lang="en-US" sz="1200" dirty="0"/>
           </a:p>
@@ -16848,6 +17602,10 @@
           </a:solidFill>
           <a:ln/>
         </p:spPr>
+        <p:txBody>
+          <a:bodyPr/>
+          <a:p/>
+        </p:txBody>
       </p:sp>
       <p:sp>
         <p:nvSpPr>
@@ -16910,6 +17668,10 @@
             <a:prstDash val="solid"/>
           </a:ln>
         </p:spPr>
+        <p:txBody>
+          <a:bodyPr/>
+          <a:p/>
+        </p:txBody>
       </p:sp>
       <p:sp>
         <p:nvSpPr>
@@ -16983,7 +17745,7 @@
                 <a:ea typeface="Calibri" pitchFamily="34" charset="-122"/>
                 <a:cs typeface="Calibri" pitchFamily="34" charset="-120"/>
               </a:rPr>
-              <a:t>7 / 18</a:t>
+              <a:t>7 / 20</a:t>
             </a:r>
             <a:endParaRPr lang="en-US" sz="1000" dirty="0"/>
           </a:p>
@@ -17020,6 +17782,10 @@
             </a:outerShdw>
           </a:effectLst>
         </p:spPr>
+        <p:txBody>
+          <a:bodyPr/>
+          <a:p/>
+        </p:txBody>
       </p:sp>
       <p:sp>
         <p:nvSpPr>
@@ -17130,6 +17896,10 @@
             </a:outerShdw>
           </a:effectLst>
         </p:spPr>
+        <p:txBody>
+          <a:bodyPr/>
+          <a:p/>
+        </p:txBody>
       </p:sp>
       <p:sp>
         <p:nvSpPr>
@@ -17240,6 +18010,10 @@
             </a:outerShdw>
           </a:effectLst>
         </p:spPr>
+        <p:txBody>
+          <a:bodyPr/>
+          <a:p/>
+        </p:txBody>
       </p:sp>
       <p:sp>
         <p:nvSpPr>
@@ -17274,7 +18048,7 @@
                 <a:ea typeface="Georgia" pitchFamily="34" charset="-122"/>
                 <a:cs typeface="Georgia" pitchFamily="34" charset="-120"/>
               </a:rPr>
-              <a:t>7</a:t>
+              <a:t>11</a:t>
             </a:r>
             <a:endParaRPr lang="en-US" sz="5600" dirty="0"/>
           </a:p>
@@ -17350,6 +18124,10 @@
             </a:outerShdw>
           </a:effectLst>
         </p:spPr>
+        <p:txBody>
+          <a:bodyPr/>
+          <a:p/>
+        </p:txBody>
       </p:sp>
       <p:sp>
         <p:nvSpPr>
@@ -17384,7 +18162,7 @@
                 <a:ea typeface="Georgia" pitchFamily="34" charset="-122"/>
                 <a:cs typeface="Georgia" pitchFamily="34" charset="-120"/>
               </a:rPr>
-              <a:t>6</a:t>
+              <a:t>12</a:t>
             </a:r>
             <a:endParaRPr lang="en-US" sz="5600" dirty="0"/>
           </a:p>
@@ -17608,49 +18386,7 @@
                 <a:ea typeface="Calibri" pitchFamily="34" charset="-122"/>
                 <a:cs typeface="Calibri" pitchFamily="34" charset="-120"/>
               </a:rPr>
-              <a:t>Métodos: Promedio · Pirámide Laplace · Curvelet · 4 configs Top-Hat representativas.</a:t>
-            </a:r>
-            <a:endParaRPr lang="en-US" sz="1300" dirty="0"/>
-          </a:p>
-          <a:p>
-            <a:pPr marL="342900" indent="-342900">
-              <a:spcAft>
-                <a:spcPts val="600"/>
-              </a:spcAft>
-              <a:buSzPct val="100000"/>
-              <a:buChar char="•"/>
-            </a:pPr>
-            <a:r>
-              <a:rPr lang="en-US" sz="1300" dirty="0">
-                <a:solidFill>
-                  <a:srgbClr val="1F2937"/>
-                </a:solidFill>
-                <a:latin typeface="Calibri" pitchFamily="34" charset="0"/>
-                <a:ea typeface="Calibri" pitchFamily="34" charset="-122"/>
-                <a:cs typeface="Calibri" pitchFamily="34" charset="-120"/>
-              </a:rPr>
-              <a:t>Métricas: EN, SD, FE, MG, MI_vis, MI_ir.</a:t>
-            </a:r>
-            <a:endParaRPr lang="en-US" sz="1300" dirty="0"/>
-          </a:p>
-          <a:p>
-            <a:pPr marL="342900" indent="-342900">
-              <a:spcAft>
-                <a:spcPts val="600"/>
-              </a:spcAft>
-              <a:buSzPct val="100000"/>
-              <a:buChar char="•"/>
-            </a:pPr>
-            <a:r>
-              <a:rPr lang="en-US" sz="1300" dirty="0">
-                <a:solidFill>
-                  <a:srgbClr val="1F2937"/>
-                </a:solidFill>
-                <a:latin typeface="Calibri" pitchFamily="34" charset="0"/>
-                <a:ea typeface="Calibri" pitchFamily="34" charset="-122"/>
-                <a:cs typeface="Calibri" pitchFamily="34" charset="-120"/>
-              </a:rPr>
-              <a:t>Análisis: Friedman global + Wilcoxon pareado + ranking promedio.</a:t>
+              <a:t>Métodos: Promedio · Pirámide Laplace · Curvelet · 4 configs Top-Hat WTH · 4 variantes WTH+BTH. 12 métricas (6 clásicas + 6 estándar de calidad).</a:t>
             </a:r>
             <a:endParaRPr lang="en-US" sz="1300" dirty="0"/>
           </a:p>
@@ -17707,6 +18443,10 @@
           </a:solidFill>
           <a:ln/>
         </p:spPr>
+        <p:txBody>
+          <a:bodyPr/>
+          <a:p/>
+        </p:txBody>
       </p:sp>
       <p:sp>
         <p:nvSpPr>
@@ -17769,6 +18509,10 @@
             <a:prstDash val="solid"/>
           </a:ln>
         </p:spPr>
+        <p:txBody>
+          <a:bodyPr/>
+          <a:p/>
+        </p:txBody>
       </p:sp>
       <p:sp>
         <p:nvSpPr>
@@ -17842,7 +18586,7 @@
                 <a:ea typeface="Calibri" pitchFamily="34" charset="-122"/>
                 <a:cs typeface="Calibri" pitchFamily="34" charset="-120"/>
               </a:rPr>
-              <a:t>8 / 18</a:t>
+              <a:t>8 / 20</a:t>
             </a:r>
             <a:endParaRPr lang="en-US" sz="1000" dirty="0"/>
           </a:p>
@@ -18068,6 +18812,10 @@
           </a:solidFill>
           <a:ln/>
         </p:spPr>
+        <p:txBody>
+          <a:bodyPr/>
+          <a:p/>
+        </p:txBody>
       </p:sp>
       <p:sp>
         <p:nvSpPr>
@@ -18130,6 +18878,10 @@
             <a:prstDash val="solid"/>
           </a:ln>
         </p:spPr>
+        <p:txBody>
+          <a:bodyPr/>
+          <a:p/>
+        </p:txBody>
       </p:sp>
       <p:sp>
         <p:nvSpPr>
@@ -18203,7 +18955,7 @@
                 <a:ea typeface="Calibri" pitchFamily="34" charset="-122"/>
                 <a:cs typeface="Calibri" pitchFamily="34" charset="-120"/>
               </a:rPr>
-              <a:t>9 / 18</a:t>
+              <a:t>9 / 20</a:t>
             </a:r>
             <a:endParaRPr lang="en-US" sz="1000" dirty="0"/>
           </a:p>
@@ -18228,6 +18980,10 @@
           </a:solidFill>
           <a:ln/>
         </p:spPr>
+        <p:txBody>
+          <a:bodyPr/>
+          <a:p/>
+        </p:txBody>
       </p:sp>
       <p:sp>
         <p:nvSpPr>
@@ -18299,6 +19055,10 @@
             </a:outerShdw>
           </a:effectLst>
         </p:spPr>
+        <p:txBody>
+          <a:bodyPr/>
+          <a:p/>
+        </p:txBody>
       </p:sp>
       <p:sp>
         <p:nvSpPr>
@@ -18319,6 +19079,10 @@
           </a:solidFill>
           <a:ln/>
         </p:spPr>
+        <p:txBody>
+          <a:bodyPr/>
+          <a:p/>
+        </p:txBody>
       </p:sp>
       <p:sp>
         <p:nvSpPr>
@@ -18496,6 +19260,10 @@
             </a:outerShdw>
           </a:effectLst>
         </p:spPr>
+        <p:txBody>
+          <a:bodyPr/>
+          <a:p/>
+        </p:txBody>
       </p:sp>
       <p:sp>
         <p:nvSpPr>
@@ -18516,6 +19284,10 @@
           </a:solidFill>
           <a:ln/>
         </p:spPr>
+        <p:txBody>
+          <a:bodyPr/>
+          <a:p/>
+        </p:txBody>
       </p:sp>
       <p:sp>
         <p:nvSpPr>

--- a/docs/Tesis_Avance_Presentacion.pptx
+++ b/docs/Tesis_Avance_Presentacion.pptx
@@ -21,6 +21,7 @@
     <p:sldId id="269" r:id="rId15"/>
     <p:sldId id="274" r:id="rId25"/>
     <p:sldId id="275" r:id="rId26"/>
+    <p:sldId id="276" r:id="rId27"/>
     <p:sldId id="270" r:id="rId16"/>
     <p:sldId id="271" r:id="rId17"/>
     <p:sldId id="272" r:id="rId18"/>
@@ -2953,7 +2954,7 @@
                 <a:ea typeface="Calibri" pitchFamily="34" charset="-122"/>
                 <a:cs typeface="Calibri" pitchFamily="34" charset="-120"/>
               </a:rPr>
-              <a:t>10 / 20</a:t>
+              <a:t>10 / 21</a:t>
             </a:r>
             <a:endParaRPr lang="en-US" sz="1000" dirty="0"/>
           </a:p>
@@ -4531,7 +4532,7 @@
                 <a:ea typeface="Calibri" pitchFamily="34" charset="-122"/>
                 <a:cs typeface="Calibri" pitchFamily="34" charset="-120"/>
               </a:rPr>
-              <a:t>11 / 20</a:t>
+              <a:t>11 / 21</a:t>
             </a:r>
             <a:endParaRPr lang="en-US" sz="1000" dirty="0"/>
           </a:p>
@@ -8645,7 +8646,7 @@
                 <a:ea typeface="Calibri" pitchFamily="34" charset="-122"/>
                 <a:cs typeface="Calibri" pitchFamily="34" charset="-120"/>
               </a:rPr>
-              <a:t>12 / 20</a:t>
+              <a:t>12 / 21</a:t>
             </a:r>
             <a:endParaRPr lang="en-US" sz="1000" dirty="0"/>
           </a:p>
@@ -8908,7 +8909,7 @@
                 <a:ea typeface="Calibri" pitchFamily="34" charset="-122"/>
                 <a:cs typeface="Calibri" pitchFamily="34" charset="-120"/>
               </a:rPr>
-              <a:t>13 / 20</a:t>
+              <a:t>13 / 21</a:t>
             </a:r>
             <a:endParaRPr lang="en-US" sz="1000" dirty="0"/>
           </a:p>
@@ -10734,7 +10735,7 @@
                 <a:ea typeface="Calibri" pitchFamily="34" charset="-122"/>
                 <a:cs typeface="Calibri" pitchFamily="34" charset="-120"/>
               </a:rPr>
-              <a:t>14 / 20</a:t>
+              <a:t>14 / 21</a:t>
             </a:r>
             <a:endParaRPr lang="en-US" sz="1000" dirty="0"/>
           </a:p>
@@ -10983,7 +10984,7 @@
                 <a:ea typeface="Calibri" pitchFamily="34" charset="-122"/>
                 <a:cs typeface="Calibri" pitchFamily="34" charset="-120"/>
               </a:rPr>
-              <a:t>15 / 20</a:t>
+              <a:t>15 / 21</a:t>
             </a:r>
             <a:endParaRPr lang="en-US" sz="1000" dirty="0"/>
           </a:p>
@@ -11232,7 +11233,7 @@
                 <a:ea typeface="Calibri" pitchFamily="34" charset="-122"/>
                 <a:cs typeface="Calibri" pitchFamily="34" charset="-120"/>
               </a:rPr>
-              <a:t>16 / 20</a:t>
+              <a:t>16 / 21</a:t>
             </a:r>
             <a:endParaRPr lang="en-US" sz="1000" dirty="0"/>
           </a:p>
@@ -11495,7 +11496,7 @@
                 <a:ea typeface="Calibri" pitchFamily="34" charset="-122"/>
                 <a:cs typeface="Calibri" pitchFamily="34" charset="-120"/>
               </a:rPr>
-              <a:t>17 / 20</a:t>
+              <a:t>18 / 21</a:t>
             </a:r>
             <a:endParaRPr lang="en-US" sz="1000" dirty="0"/>
           </a:p>
@@ -12403,7 +12404,7 @@
                 <a:ea typeface="Calibri" pitchFamily="34" charset="-122"/>
                 <a:cs typeface="Calibri" pitchFamily="34" charset="-120"/>
               </a:rPr>
-              <a:t>18 / 20</a:t>
+              <a:t>19 / 21</a:t>
             </a:r>
             <a:endParaRPr lang="en-US" sz="1000" dirty="0"/>
           </a:p>
@@ -13113,7 +13114,7 @@
                 <a:ea typeface="Calibri" pitchFamily="34" charset="-122"/>
                 <a:cs typeface="Calibri" pitchFamily="34" charset="-120"/>
               </a:rPr>
-              <a:t>19 / 20</a:t>
+              <a:t>20 / 21</a:t>
             </a:r>
             <a:endParaRPr lang="en-US" sz="1000" dirty="0"/>
           </a:p>
@@ -13940,7 +13941,7 @@
                 <a:ea typeface="Calibri" pitchFamily="34" charset="-122"/>
                 <a:cs typeface="Calibri" pitchFamily="34" charset="-120"/>
               </a:rPr>
-              <a:t>2 / 20</a:t>
+              <a:t>2 / 21</a:t>
             </a:r>
             <a:endParaRPr lang="en-US" sz="1000" dirty="0"/>
           </a:p>
@@ -14898,6 +14899,255 @@
 </p:sld>
 </file>
 
+<file path=ppt/slides/slide21.xml><?xml version="1.0" encoding="utf-8"?>
+<p:sld xmlns:a="http://schemas.openxmlformats.org/drawingml/2006/main" xmlns:p="http://schemas.openxmlformats.org/presentationml/2006/main" xmlns:r="http://schemas.openxmlformats.org/officeDocument/2006/relationships">
+  <p:cSld>
+    <p:spTree>
+      <p:nvGrpSpPr>
+        <p:cNvPr id="1" name=""/>
+        <p:cNvGrpSpPr/>
+        <p:nvPr/>
+      </p:nvGrpSpPr>
+      <p:grpSpPr/>
+      <p:sp>
+        <p:nvSpPr>
+          <p:cNvPr id="2" name="Shape 0"/>
+          <p:cNvSpPr/>
+          <p:nvPr/>
+        </p:nvSpPr>
+        <p:spPr>
+          <a:xfrm>
+            <a:off x="0" y="0"/>
+            <a:ext cx="320040" cy="6858000"/>
+          </a:xfrm>
+          <a:prstGeom prst="rect">
+            <a:avLst/>
+          </a:prstGeom>
+          <a:solidFill>
+            <a:srgbClr val="1E2761"/>
+          </a:solidFill>
+          <a:ln/>
+        </p:spPr>
+        <p:txBody>
+          <a:bodyPr/>
+          <a:p/>
+        </p:txBody>
+      </p:sp>
+      <p:sp>
+        <p:nvSpPr>
+          <p:cNvPr id="3" name="Text 1"/>
+          <p:cNvSpPr/>
+          <p:nvPr/>
+        </p:nvSpPr>
+        <p:spPr>
+          <a:xfrm>
+            <a:off x="640080" y="320040"/>
+            <a:ext cx="10607040" cy="640080"/>
+          </a:xfrm>
+          <a:prstGeom prst="rect">
+            <a:avLst/>
+          </a:prstGeom>
+          <a:noFill/>
+          <a:ln/>
+        </p:spPr>
+        <p:txBody>
+          <a:bodyPr wrap="square" lIns="0" tIns="0" rIns="0" bIns="0" rtlCol="0" anchor="ctr"/>
+          <a:lstStyle/>
+          <a:p>
+            <a:pPr indent="0" marL="0">
+              <a:buNone/>
+            </a:pPr>
+            <a:r>
+              <a:rPr lang="en-US" sz="2800" b="1" dirty="0">
+                <a:solidFill>
+                  <a:srgbClr val="1E2761"/>
+                </a:solidFill>
+                <a:latin typeface="Georgia" pitchFamily="34" charset="0"/>
+                <a:ea typeface="Georgia" pitchFamily="34" charset="-122"/>
+                <a:cs typeface="Georgia" pitchFamily="34" charset="-120"/>
+              </a:rPr>
+              <a:t>Evaluación orientada a tarea: detección con YOLO</a:t>
+            </a:r>
+            <a:endParaRPr lang="en-US" sz="2800" dirty="0"/>
+          </a:p>
+        </p:txBody>
+      </p:sp>
+      <p:sp>
+        <p:nvSpPr>
+          <p:cNvPr id="4" name="Shape 2"/>
+          <p:cNvSpPr/>
+          <p:nvPr/>
+        </p:nvSpPr>
+        <p:spPr>
+          <a:xfrm>
+            <a:off x="640080" y="960120"/>
+            <a:ext cx="10881360" cy="0"/>
+          </a:xfrm>
+          <a:prstGeom prst="line">
+            <a:avLst/>
+          </a:prstGeom>
+          <a:noFill/>
+          <a:ln w="19050">
+            <a:solidFill>
+              <a:srgbClr val="CADCFC"/>
+            </a:solidFill>
+            <a:prstDash val="solid"/>
+          </a:ln>
+        </p:spPr>
+        <p:txBody>
+          <a:bodyPr/>
+          <a:p/>
+        </p:txBody>
+      </p:sp>
+      <p:sp>
+        <p:nvSpPr>
+          <p:cNvPr id="5" name="Text 3"/>
+          <p:cNvSpPr/>
+          <p:nvPr/>
+        </p:nvSpPr>
+        <p:spPr>
+          <a:xfrm>
+            <a:off x="640080" y="6492240"/>
+            <a:ext cx="6400800" cy="274320"/>
+          </a:xfrm>
+          <a:prstGeom prst="rect">
+            <a:avLst/>
+          </a:prstGeom>
+          <a:noFill/>
+          <a:ln/>
+        </p:spPr>
+        <p:txBody>
+          <a:bodyPr wrap="square" lIns="0" tIns="0" rIns="0" bIns="0" rtlCol="0" anchor="ctr"/>
+          <a:lstStyle/>
+          <a:p>
+            <a:pPr indent="0" marL="0">
+              <a:buNone/>
+            </a:pPr>
+            <a:r>
+              <a:rPr lang="en-US" sz="1000" i="1" dirty="0">
+                <a:solidFill>
+                  <a:srgbClr val="64748B"/>
+                </a:solidFill>
+                <a:latin typeface="Calibri" pitchFamily="34" charset="0"/>
+                <a:ea typeface="Calibri" pitchFamily="34" charset="-122"/>
+                <a:cs typeface="Calibri" pitchFamily="34" charset="-120"/>
+              </a:rPr>
+              <a:t>Tesis Maestría en Ciencias de Datos — UCOM</a:t>
+            </a:r>
+            <a:endParaRPr lang="en-US" sz="1000" dirty="0"/>
+          </a:p>
+        </p:txBody>
+      </p:sp>
+      <p:sp>
+        <p:nvSpPr>
+          <p:cNvPr id="6" name="Text 4"/>
+          <p:cNvSpPr/>
+          <p:nvPr/>
+        </p:nvSpPr>
+        <p:spPr>
+          <a:xfrm>
+            <a:off x="11064240" y="6492240"/>
+            <a:ext cx="457200" cy="274320"/>
+          </a:xfrm>
+          <a:prstGeom prst="rect">
+            <a:avLst/>
+          </a:prstGeom>
+          <a:noFill/>
+          <a:ln/>
+        </p:spPr>
+        <p:txBody>
+          <a:bodyPr wrap="square" lIns="0" tIns="0" rIns="0" bIns="0" rtlCol="0" anchor="ctr"/>
+          <a:lstStyle/>
+          <a:p>
+            <a:pPr algn="r" indent="0" marL="0">
+              <a:buNone/>
+            </a:pPr>
+            <a:r>
+              <a:rPr lang="en-US" sz="1000" dirty="0">
+                <a:solidFill>
+                  <a:srgbClr val="64748B"/>
+                </a:solidFill>
+                <a:latin typeface="Calibri" pitchFamily="34" charset="0"/>
+                <a:ea typeface="Calibri" pitchFamily="34" charset="-122"/>
+                <a:cs typeface="Calibri" pitchFamily="34" charset="-120"/>
+              </a:rPr>
+              <a:t>17 / 21</a:t>
+            </a:r>
+            <a:endParaRPr lang="en-US" sz="1000" dirty="0"/>
+          </a:p>
+        </p:txBody>
+      </p:sp>
+      <p:pic>
+        <p:nvPicPr>
+          <p:cNvPr id="7" name="Image 0" descr="/sessions/modest-affectionate-curie/mnt/mastertesis/tesis_mciencias_datos/docs/figures/fig_heatmap_tophat.png">    </p:cNvPr>
+          <p:cNvPicPr>
+            <a:picLocks noChangeAspect="1"/>
+          </p:cNvPicPr>
+          <p:nvPr/>
+        </p:nvPicPr>
+        <p:blipFill>
+          <a:blip r:embed="rId2"/>
+          <a:stretch>
+            <a:fillRect/>
+          </a:stretch>
+        </p:blipFill>
+        <p:spPr>
+          <a:xfrm>
+            <a:off x="365760" y="1188720"/>
+            <a:ext cx="11430000" cy="4408714"/>
+          </a:xfrm>
+          <a:prstGeom prst="rect">
+            <a:avLst/>
+          </a:prstGeom>
+        </p:spPr>
+      </p:pic>
+      <p:sp>
+        <p:nvSpPr>
+          <p:cNvPr id="8" name="Text 5"/>
+          <p:cNvSpPr/>
+          <p:nvPr/>
+        </p:nvSpPr>
+        <p:spPr>
+          <a:xfrm>
+            <a:off x="640080" y="6263640"/>
+            <a:ext cx="10881360" cy="365760"/>
+          </a:xfrm>
+          <a:prstGeom prst="rect">
+            <a:avLst/>
+          </a:prstGeom>
+          <a:noFill/>
+          <a:ln/>
+        </p:spPr>
+        <p:txBody>
+          <a:bodyPr wrap="square" lIns="0" tIns="0" rIns="0" bIns="0" rtlCol="0" anchor="ctr"/>
+          <a:lstStyle/>
+          <a:p>
+            <a:pPr algn="ctr" indent="0" marL="0">
+              <a:buNone/>
+            </a:pPr>
+            <a:r>
+              <a:rPr lang="en-US" sz="1100" i="1" dirty="0">
+                <a:solidFill>
+                  <a:srgbClr val="1E2761"/>
+                </a:solidFill>
+                <a:latin typeface="Calibri" pitchFamily="34" charset="0"/>
+                <a:ea typeface="Calibri" pitchFamily="34" charset="-122"/>
+                <a:cs typeface="Calibri" pitchFamily="34" charset="-120"/>
+              </a:rPr>
+              <a:t>YOLOv8n (inferencia, sin etiquetas): en VIS se detecta solo 1 persona; con fusión sube a 13 (WTH) y 16 (+BTH). VIS favorece vehículos, IR/fusión personas; la fusión WTH equilibra ambas (13 personas, 12 vehículos). Diferencias entre métodos no significativas (n=20); mAP pendiente con dataset etiquetado.</a:t>
+            </a:r>
+            <a:endParaRPr lang="en-US" sz="1100" dirty="0"/>
+          </a:p>
+        </p:txBody>
+      </p:sp>
+    </p:spTree>
+  </p:cSld>
+  <p:clrMapOvr>
+    <a:masterClrMapping/>
+  </p:clrMapOvr>
+</p:sld>
+</file>
+
 <file path=ppt/slides/slide3.xml><?xml version="1.0" encoding="utf-8"?>
 <p:sld xmlns:a="http://schemas.openxmlformats.org/drawingml/2006/main" xmlns:r="http://schemas.openxmlformats.org/officeDocument/2006/relationships" xmlns:p="http://schemas.openxmlformats.org/presentationml/2006/main">
   <p:cSld name="Slide 3">
@@ -15084,7 +15334,7 @@
                 <a:ea typeface="Calibri" pitchFamily="34" charset="-122"/>
                 <a:cs typeface="Calibri" pitchFamily="34" charset="-120"/>
               </a:rPr>
-              <a:t>3 / 20</a:t>
+              <a:t>3 / 21</a:t>
             </a:r>
             <a:endParaRPr lang="en-US" sz="1000" dirty="0"/>
           </a:p>
@@ -15631,7 +15881,7 @@
                 <a:ea typeface="Calibri" pitchFamily="34" charset="-122"/>
                 <a:cs typeface="Calibri" pitchFamily="34" charset="-120"/>
               </a:rPr>
-              <a:t>4 / 20</a:t>
+              <a:t>4 / 21</a:t>
             </a:r>
             <a:endParaRPr lang="en-US" sz="1000" dirty="0"/>
           </a:p>
@@ -16416,7 +16666,7 @@
                 <a:ea typeface="Calibri" pitchFamily="34" charset="-122"/>
                 <a:cs typeface="Calibri" pitchFamily="34" charset="-120"/>
               </a:rPr>
-              <a:t>5 / 20</a:t>
+              <a:t>5 / 21</a:t>
             </a:r>
             <a:endParaRPr lang="en-US" sz="1000" dirty="0"/>
           </a:p>
@@ -17144,7 +17394,7 @@
                 <a:ea typeface="Calibri" pitchFamily="34" charset="-122"/>
                 <a:cs typeface="Calibri" pitchFamily="34" charset="-120"/>
               </a:rPr>
-              <a:t>6 / 20</a:t>
+              <a:t>6 / 21</a:t>
             </a:r>
             <a:endParaRPr lang="en-US" sz="1000" dirty="0"/>
           </a:p>
@@ -17745,7 +17995,7 @@
                 <a:ea typeface="Calibri" pitchFamily="34" charset="-122"/>
                 <a:cs typeface="Calibri" pitchFamily="34" charset="-120"/>
               </a:rPr>
-              <a:t>7 / 20</a:t>
+              <a:t>7 / 21</a:t>
             </a:r>
             <a:endParaRPr lang="en-US" sz="1000" dirty="0"/>
           </a:p>
@@ -18586,7 +18836,7 @@
                 <a:ea typeface="Calibri" pitchFamily="34" charset="-122"/>
                 <a:cs typeface="Calibri" pitchFamily="34" charset="-120"/>
               </a:rPr>
-              <a:t>8 / 20</a:t>
+              <a:t>8 / 21</a:t>
             </a:r>
             <a:endParaRPr lang="en-US" sz="1000" dirty="0"/>
           </a:p>
@@ -18955,7 +19205,7 @@
                 <a:ea typeface="Calibri" pitchFamily="34" charset="-122"/>
                 <a:cs typeface="Calibri" pitchFamily="34" charset="-120"/>
               </a:rPr>
-              <a:t>9 / 20</a:t>
+              <a:t>9 / 21</a:t>
             </a:r>
             <a:endParaRPr lang="en-US" sz="1000" dirty="0"/>
           </a:p>

--- a/docs/Tesis_Avance_Presentacion.pptx
+++ b/docs/Tesis_Avance_Presentacion.pptx
@@ -4816,7 +4816,7 @@
           <p:nvPr/>
         </p:nvPicPr>
         <p:blipFill>
-          <a:blip r:embed="rId2"/>
+          <a:blip r:embed="rId3"/>
           <a:stretch>
             <a:fillRect/>
           </a:stretch>
@@ -4824,7 +4824,7 @@
         <p:spPr>
           <a:xfrm>
             <a:off x="2817932" y="1508760"/>
-            <a:ext cx="6525655" cy="3657600"/>
+            <a:ext cx="6525655" cy="4307534"/>
           </a:xfrm>
           <a:prstGeom prst="rect">
             <a:avLst/>
